--- a/GBPlanner项目进展汇报.pptx
+++ b/GBPlanner项目进展汇报.pptx
@@ -14,9 +14,11 @@
     <p:sldId id="262" r:id="rId8"/>
     <p:sldId id="263" r:id="rId9"/>
     <p:sldId id="264" r:id="rId10"/>
+    <p:sldId id="265" r:id="rId11"/>
+    <p:sldId id="266" r:id="rId12"/>
   </p:sldIdLst>
   <p:notesMasterIdLst>
-    <p:notesMasterId r:id="rId11"/>
+    <p:notesMasterId r:id="rId13"/>
   </p:notesMasterIdLst>
   <p:sldSz cx="12188952" cy="6858000"/>
   <p:notesSz cx="6858000" cy="12188952"/>
@@ -534,6 +536,182 @@
             <a:fld id="{F7021451-1387-4CA6-816F-3879F97B5CBC}" type="slidenum">
               <a:rPr lang="en-US"/>
               <a:t>1</a:t>
+            </a:fld>
+            <a:endParaRPr lang="en-US"/>
+          </a:p>
+        </p:txBody>
+      </p:sp>
+    </p:spTree>
+    <p:extLst>
+      <p:ext uri="{BB962C8B-B14F-4D97-AF65-F5344CB8AC3E}">
+        <p14:creationId xmlns:p14="http://schemas.microsoft.com/office/powerpoint/2010/main" val="1024086991"/>
+      </p:ext>
+    </p:extLst>
+  </p:cSld>
+  <p:clrMapOvr>
+    <a:masterClrMapping/>
+  </p:clrMapOvr>
+</p:notes>
+</file>
+
+<file path=ppt/notesSlides/notesSlide10.xml><?xml version="1.0" encoding="utf-8"?>
+<p:notes xmlns:a="http://schemas.openxmlformats.org/drawingml/2006/main" xmlns:r="http://schemas.openxmlformats.org/officeDocument/2006/relationships" xmlns:p="http://schemas.openxmlformats.org/presentationml/2006/main">
+  <p:cSld>
+    <p:spTree>
+      <p:nvGrpSpPr>
+        <p:cNvPr id="1" name=""/>
+        <p:cNvGrpSpPr/>
+        <p:nvPr/>
+      </p:nvGrpSpPr>
+      <p:grpSpPr>
+        <a:xfrm>
+          <a:off x="0" y="0"/>
+          <a:ext cx="0" cy="0"/>
+          <a:chOff x="0" y="0"/>
+          <a:chExt cx="0" cy="0"/>
+        </a:xfrm>
+      </p:grpSpPr>
+      <p:sp>
+        <p:nvSpPr>
+          <p:cNvPr id="2" name="Slide Image Placeholder 1"/>
+          <p:cNvSpPr>
+            <a:spLocks noGrp="1" noRot="1" noChangeAspect="1"/>
+          </p:cNvSpPr>
+          <p:nvPr>
+            <p:ph type="sldImg"/>
+          </p:nvPr>
+        </p:nvSpPr>
+        <p:spPr/>
+      </p:sp>
+      <p:sp>
+        <p:nvSpPr>
+          <p:cNvPr id="3" name="Notes Placeholder 2"/>
+          <p:cNvSpPr>
+            <a:spLocks noGrp="1"/>
+          </p:cNvSpPr>
+          <p:nvPr>
+            <p:ph type="body" idx="1"/>
+          </p:nvPr>
+        </p:nvSpPr>
+        <p:spPr/>
+        <p:txBody>
+          <a:bodyPr/>
+          <a:lstStyle/>
+          <a:p>
+            <a:r>
+              <a:rPr lang="en-US" dirty="0"/>
+              <a:t/>
+            </a:r>
+            <a:endParaRPr lang="en-US" dirty="0"/>
+          </a:p>
+        </p:txBody>
+      </p:sp>
+      <p:sp>
+        <p:nvSpPr>
+          <p:cNvPr id="4" name="Slide Number Placeholder 3"/>
+          <p:cNvSpPr>
+            <a:spLocks noGrp="1"/>
+          </p:cNvSpPr>
+          <p:nvPr>
+            <p:ph type="sldNum" sz="quarter" idx="10"/>
+          </p:nvPr>
+        </p:nvSpPr>
+        <p:spPr/>
+        <p:txBody>
+          <a:bodyPr/>
+          <a:lstStyle/>
+          <a:p>
+            <a:fld id="{F7021451-1387-4CA6-816F-3879F97B5CBC}" type="slidenum">
+              <a:rPr lang="en-US"/>
+              <a:t>10</a:t>
+            </a:fld>
+            <a:endParaRPr lang="en-US"/>
+          </a:p>
+        </p:txBody>
+      </p:sp>
+    </p:spTree>
+    <p:extLst>
+      <p:ext uri="{BB962C8B-B14F-4D97-AF65-F5344CB8AC3E}">
+        <p14:creationId xmlns:p14="http://schemas.microsoft.com/office/powerpoint/2010/main" val="1024086991"/>
+      </p:ext>
+    </p:extLst>
+  </p:cSld>
+  <p:clrMapOvr>
+    <a:masterClrMapping/>
+  </p:clrMapOvr>
+</p:notes>
+</file>
+
+<file path=ppt/notesSlides/notesSlide11.xml><?xml version="1.0" encoding="utf-8"?>
+<p:notes xmlns:a="http://schemas.openxmlformats.org/drawingml/2006/main" xmlns:r="http://schemas.openxmlformats.org/officeDocument/2006/relationships" xmlns:p="http://schemas.openxmlformats.org/presentationml/2006/main">
+  <p:cSld>
+    <p:spTree>
+      <p:nvGrpSpPr>
+        <p:cNvPr id="1" name=""/>
+        <p:cNvGrpSpPr/>
+        <p:nvPr/>
+      </p:nvGrpSpPr>
+      <p:grpSpPr>
+        <a:xfrm>
+          <a:off x="0" y="0"/>
+          <a:ext cx="0" cy="0"/>
+          <a:chOff x="0" y="0"/>
+          <a:chExt cx="0" cy="0"/>
+        </a:xfrm>
+      </p:grpSpPr>
+      <p:sp>
+        <p:nvSpPr>
+          <p:cNvPr id="2" name="Slide Image Placeholder 1"/>
+          <p:cNvSpPr>
+            <a:spLocks noGrp="1" noRot="1" noChangeAspect="1"/>
+          </p:cNvSpPr>
+          <p:nvPr>
+            <p:ph type="sldImg"/>
+          </p:nvPr>
+        </p:nvSpPr>
+        <p:spPr/>
+      </p:sp>
+      <p:sp>
+        <p:nvSpPr>
+          <p:cNvPr id="3" name="Notes Placeholder 2"/>
+          <p:cNvSpPr>
+            <a:spLocks noGrp="1"/>
+          </p:cNvSpPr>
+          <p:nvPr>
+            <p:ph type="body" idx="1"/>
+          </p:nvPr>
+        </p:nvSpPr>
+        <p:spPr/>
+        <p:txBody>
+          <a:bodyPr/>
+          <a:lstStyle/>
+          <a:p>
+            <a:r>
+              <a:rPr lang="en-US" dirty="0"/>
+              <a:t/>
+            </a:r>
+            <a:endParaRPr lang="en-US" dirty="0"/>
+          </a:p>
+        </p:txBody>
+      </p:sp>
+      <p:sp>
+        <p:nvSpPr>
+          <p:cNvPr id="4" name="Slide Number Placeholder 3"/>
+          <p:cNvSpPr>
+            <a:spLocks noGrp="1"/>
+          </p:cNvSpPr>
+          <p:nvPr>
+            <p:ph type="sldNum" sz="quarter" idx="10"/>
+          </p:nvPr>
+        </p:nvSpPr>
+        <p:spPr/>
+        <p:txBody>
+          <a:bodyPr/>
+          <a:lstStyle/>
+          <a:p>
+            <a:fld id="{F7021451-1387-4CA6-816F-3879F97B5CBC}" type="slidenum">
+              <a:rPr lang="en-US"/>
+              <a:t>11</a:t>
             </a:fld>
             <a:endParaRPr lang="en-US"/>
           </a:p>
@@ -1774,6 +1952,629 @@
 </p:sld>
 </file>
 
+<file path=ppt/slides/slide10.xml><?xml version="1.0" encoding="utf-8"?>
+<p:sld xmlns:a="http://schemas.openxmlformats.org/drawingml/2006/main" xmlns:r="http://schemas.openxmlformats.org/officeDocument/2006/relationships" xmlns:p="http://schemas.openxmlformats.org/presentationml/2006/main">
+  <p:cSld name="Slide 10">
+    <p:bg>
+      <p:bgPr>
+        <a:solidFill>
+          <a:srgbClr val="FFFFFF"/>
+        </a:solidFill>
+      </p:bgPr>
+    </p:bg>
+    <p:spTree>
+      <p:nvGrpSpPr>
+        <p:cNvPr id="1" name=""/>
+        <p:cNvGrpSpPr/>
+        <p:nvPr/>
+      </p:nvGrpSpPr>
+      <p:grpSpPr>
+        <a:xfrm>
+          <a:off x="0" y="0"/>
+          <a:ext cx="0" cy="0"/>
+          <a:chOff x="0" y="0"/>
+          <a:chExt cx="0" cy="0"/>
+        </a:xfrm>
+      </p:grpSpPr>
+      <p:sp>
+        <p:nvSpPr>
+          <p:cNvPr id="2" name="Text 0"/>
+          <p:cNvSpPr/>
+          <p:nvPr/>
+        </p:nvSpPr>
+        <p:spPr>
+          <a:xfrm>
+            <a:off x="548640" y="411480"/>
+            <a:ext cx="11064240" cy="640080"/>
+          </a:xfrm>
+          <a:prstGeom prst="rect">
+            <a:avLst/>
+          </a:prstGeom>
+          <a:noFill/>
+          <a:ln/>
+        </p:spPr>
+        <p:txBody>
+          <a:bodyPr wrap="square" rtlCol="0" anchor="ctr"/>
+          <a:lstStyle/>
+          <a:p>
+            <a:pPr indent="0" marL="0">
+              <a:buNone/>
+            </a:pPr>
+            <a:r>
+              <a:rPr lang="en-US" sz="3000" b="1" dirty="0">
+                <a:solidFill>
+                  <a:srgbClr val="1E2761"/>
+                </a:solidFill>
+                <a:latin typeface="Microsoft YaHei" pitchFamily="34" charset="0"/>
+                <a:ea typeface="Microsoft YaHei" pitchFamily="34" charset="-122"/>
+                <a:cs typeface="Microsoft YaHei" pitchFamily="34" charset="-120"/>
+              </a:rPr>
+              <a:t>当前状态与下一步</a:t>
+            </a:r>
+            <a:endParaRPr lang="en-US" sz="3000" dirty="0"/>
+          </a:p>
+        </p:txBody>
+      </p:sp>
+      <p:sp>
+        <p:nvSpPr>
+          <p:cNvPr id="3" name="Shape 1"/>
+          <p:cNvSpPr/>
+          <p:nvPr/>
+        </p:nvSpPr>
+        <p:spPr>
+          <a:xfrm>
+            <a:off x="548640" y="1645920"/>
+            <a:ext cx="5486400" cy="4389120"/>
+          </a:xfrm>
+          <a:prstGeom prst="roundRect">
+            <a:avLst>
+              <a:gd name="adj" fmla="val 1667"/>
+            </a:avLst>
+          </a:prstGeom>
+          <a:solidFill>
+            <a:srgbClr val="F0FDF4"/>
+          </a:solidFill>
+          <a:ln w="12700">
+            <a:solidFill>
+              <a:srgbClr val="E2E8F0"/>
+            </a:solidFill>
+            <a:prstDash val="solid"/>
+          </a:ln>
+        </p:spPr>
+      </p:sp>
+      <p:sp>
+        <p:nvSpPr>
+          <p:cNvPr id="4" name="Text 2"/>
+          <p:cNvSpPr/>
+          <p:nvPr/>
+        </p:nvSpPr>
+        <p:spPr>
+          <a:xfrm>
+            <a:off x="777240" y="1828800"/>
+            <a:ext cx="5029200" cy="365760"/>
+          </a:xfrm>
+          <a:prstGeom prst="rect">
+            <a:avLst/>
+          </a:prstGeom>
+          <a:noFill/>
+          <a:ln/>
+        </p:spPr>
+        <p:txBody>
+          <a:bodyPr wrap="square" rtlCol="0" anchor="ctr"/>
+          <a:lstStyle/>
+          <a:p>
+            <a:pPr indent="0" marL="0">
+              <a:buNone/>
+            </a:pPr>
+            <a:r>
+              <a:rPr lang="en-US" sz="1700" b="1" dirty="0">
+                <a:solidFill>
+                  <a:srgbClr val="16A34A"/>
+                </a:solidFill>
+                <a:latin typeface="Microsoft YaHei" pitchFamily="34" charset="0"/>
+                <a:ea typeface="Microsoft YaHei" pitchFamily="34" charset="-122"/>
+                <a:cs typeface="Microsoft YaHei" pitchFamily="34" charset="-120"/>
+              </a:rPr>
+              <a:t>✓ 已完成(扎实)</a:t>
+            </a:r>
+            <a:endParaRPr lang="en-US" sz="1700" dirty="0"/>
+          </a:p>
+        </p:txBody>
+      </p:sp>
+      <p:sp>
+        <p:nvSpPr>
+          <p:cNvPr id="5" name="Text 3"/>
+          <p:cNvSpPr/>
+          <p:nvPr/>
+        </p:nvSpPr>
+        <p:spPr>
+          <a:xfrm>
+            <a:off x="777240" y="2286000"/>
+            <a:ext cx="5029200" cy="3566160"/>
+          </a:xfrm>
+          <a:prstGeom prst="rect">
+            <a:avLst/>
+          </a:prstGeom>
+          <a:noFill/>
+          <a:ln/>
+        </p:spPr>
+        <p:txBody>
+          <a:bodyPr wrap="square" rtlCol="0" anchor="t"/>
+          <a:lstStyle/>
+          <a:p>
+            <a:pPr indent="0" marL="0">
+              <a:lnSpc>
+                <a:spcPct val="130000"/>
+              </a:lnSpc>
+              <a:buNone/>
+            </a:pPr>
+            <a:r>
+              <a:rPr lang="en-US" sz="1300" dirty="0">
+                <a:solidFill>
+                  <a:srgbClr val="1F2937"/>
+                </a:solidFill>
+                <a:latin typeface="Microsoft YaHei" pitchFamily="34" charset="0"/>
+                <a:ea typeface="Microsoft YaHei" pitchFamily="34" charset="-122"/>
+                <a:cs typeface="Microsoft YaHei" pitchFamily="34" charset="-120"/>
+              </a:rPr>
+              <a:t>• 摸清两个系统 + 三道鸿沟,定下桥接方案</a:t>
+            </a:r>
+            <a:endParaRPr lang="en-US" sz="1300" dirty="0"/>
+          </a:p>
+          <a:p>
+            <a:pPr indent="0" marL="0">
+              <a:lnSpc>
+                <a:spcPct val="130000"/>
+              </a:lnSpc>
+              <a:buNone/>
+            </a:pPr>
+            <a:r>
+              <a:rPr lang="en-US" sz="1300" dirty="0">
+                <a:solidFill>
+                  <a:srgbClr val="1F2937"/>
+                </a:solidFill>
+                <a:latin typeface="Microsoft YaHei" pitchFamily="34" charset="0"/>
+                <a:ea typeface="Microsoft YaHei" pitchFamily="34" charset="-122"/>
+                <a:cs typeface="Microsoft YaHei" pitchFamily="34" charset="-120"/>
+              </a:rPr>
+              <a:t>• 算法核心可运行:体积增益决策演示 + 单测</a:t>
+            </a:r>
+            <a:endParaRPr lang="en-US" sz="1300" dirty="0"/>
+          </a:p>
+          <a:p>
+            <a:pPr indent="0" marL="0">
+              <a:lnSpc>
+                <a:spcPct val="130000"/>
+              </a:lnSpc>
+              <a:buNone/>
+            </a:pPr>
+            <a:r>
+              <a:rPr lang="en-US" sz="1300" dirty="0">
+                <a:solidFill>
+                  <a:srgbClr val="1F2937"/>
+                </a:solidFill>
+                <a:latin typeface="Microsoft YaHei" pitchFamily="34" charset="0"/>
+                <a:ea typeface="Microsoft YaHei" pitchFamily="34" charset="-122"/>
+                <a:cs typeface="Microsoft YaHei" pitchFamily="34" charset="-120"/>
+              </a:rPr>
+              <a:t>• gbplanner_gain 决策层原型接进 world-model 结构</a:t>
+            </a:r>
+            <a:endParaRPr lang="en-US" sz="1300" dirty="0"/>
+          </a:p>
+          <a:p>
+            <a:pPr indent="0" marL="0">
+              <a:lnSpc>
+                <a:spcPct val="130000"/>
+              </a:lnSpc>
+              <a:buNone/>
+            </a:pPr>
+            <a:r>
+              <a:rPr lang="en-US" sz="1300" dirty="0">
+                <a:solidFill>
+                  <a:srgbClr val="1F2937"/>
+                </a:solidFill>
+                <a:latin typeface="Microsoft YaHei" pitchFamily="34" charset="0"/>
+                <a:ea typeface="Microsoft YaHei" pitchFamily="34" charset="-122"/>
+                <a:cs typeface="Microsoft YaHei" pitchFamily="34" charset="-120"/>
+              </a:rPr>
+              <a:t>• 阶段4 桥接地基:源码证实真版 I/O 契约 + ROS2 适配器</a:t>
+            </a:r>
+            <a:endParaRPr lang="en-US" sz="1300" dirty="0"/>
+          </a:p>
+          <a:p>
+            <a:pPr indent="0" marL="0">
+              <a:lnSpc>
+                <a:spcPct val="130000"/>
+              </a:lnSpc>
+              <a:buNone/>
+            </a:pPr>
+            <a:r>
+              <a:rPr lang="en-US" sz="1300" dirty="0">
+                <a:solidFill>
+                  <a:srgbClr val="1F2937"/>
+                </a:solidFill>
+                <a:latin typeface="Microsoft YaHei" pitchFamily="34" charset="0"/>
+                <a:ea typeface="Microsoft YaHei" pitchFamily="34" charset="-122"/>
+                <a:cs typeface="Microsoft YaHei" pitchFamily="34" charset="-120"/>
+              </a:rPr>
+              <a:t>• 连修 3 个 humble 真 bug,SLAM 从一崩→cartographer 真运行</a:t>
+            </a:r>
+            <a:endParaRPr lang="en-US" sz="1300" dirty="0"/>
+          </a:p>
+          <a:p>
+            <a:pPr indent="0" marL="0">
+              <a:lnSpc>
+                <a:spcPct val="130000"/>
+              </a:lnSpc>
+              <a:buNone/>
+            </a:pPr>
+            <a:r>
+              <a:rPr lang="en-US" sz="1300" dirty="0">
+                <a:solidFill>
+                  <a:srgbClr val="1F2937"/>
+                </a:solidFill>
+                <a:latin typeface="Microsoft YaHei" pitchFamily="34" charset="0"/>
+                <a:ea typeface="Microsoft YaHei" pitchFamily="34" charset="-122"/>
+                <a:cs typeface="Microsoft YaHei" pitchFamily="34" charset="-120"/>
+              </a:rPr>
+              <a:t>• 9/9 镜像构建成功;缺陷有代码铁证</a:t>
+            </a:r>
+            <a:endParaRPr lang="en-US" sz="1300" dirty="0"/>
+          </a:p>
+          <a:p>
+            <a:pPr indent="0" marL="0">
+              <a:lnSpc>
+                <a:spcPct val="130000"/>
+              </a:lnSpc>
+              <a:buNone/>
+            </a:pPr>
+            <a:r>
+              <a:rPr lang="en-US" sz="1300" dirty="0">
+                <a:solidFill>
+                  <a:srgbClr val="1F2937"/>
+                </a:solidFill>
+                <a:latin typeface="Microsoft YaHei" pitchFamily="34" charset="0"/>
+                <a:ea typeface="Microsoft YaHei" pitchFamily="34" charset="-122"/>
+                <a:cs typeface="Microsoft YaHei" pitchFamily="34" charset="-120"/>
+              </a:rPr>
+              <a:t>• PR/Issue 物料备好 + 完整文档 + GitHub 私有仓</a:t>
+            </a:r>
+            <a:endParaRPr lang="en-US" sz="1300" dirty="0"/>
+          </a:p>
+        </p:txBody>
+      </p:sp>
+      <p:sp>
+        <p:nvSpPr>
+          <p:cNvPr id="6" name="Shape 4"/>
+          <p:cNvSpPr/>
+          <p:nvPr/>
+        </p:nvSpPr>
+        <p:spPr>
+          <a:xfrm>
+            <a:off x="6309360" y="1645920"/>
+            <a:ext cx="5303520" cy="4389120"/>
+          </a:xfrm>
+          <a:prstGeom prst="roundRect">
+            <a:avLst>
+              <a:gd name="adj" fmla="val 1667"/>
+            </a:avLst>
+          </a:prstGeom>
+          <a:solidFill>
+            <a:srgbClr val="EFF6FF"/>
+          </a:solidFill>
+          <a:ln w="12700">
+            <a:solidFill>
+              <a:srgbClr val="E2E8F0"/>
+            </a:solidFill>
+            <a:prstDash val="solid"/>
+          </a:ln>
+        </p:spPr>
+      </p:sp>
+      <p:sp>
+        <p:nvSpPr>
+          <p:cNvPr id="7" name="Text 5"/>
+          <p:cNvSpPr/>
+          <p:nvPr/>
+        </p:nvSpPr>
+        <p:spPr>
+          <a:xfrm>
+            <a:off x="6537960" y="1828800"/>
+            <a:ext cx="4846320" cy="365760"/>
+          </a:xfrm>
+          <a:prstGeom prst="rect">
+            <a:avLst/>
+          </a:prstGeom>
+          <a:noFill/>
+          <a:ln/>
+        </p:spPr>
+        <p:txBody>
+          <a:bodyPr wrap="square" rtlCol="0" anchor="ctr"/>
+          <a:lstStyle/>
+          <a:p>
+            <a:pPr indent="0" marL="0">
+              <a:buNone/>
+            </a:pPr>
+            <a:r>
+              <a:rPr lang="en-US" sz="1700" b="1" dirty="0">
+                <a:solidFill>
+                  <a:srgbClr val="1E2761"/>
+                </a:solidFill>
+                <a:latin typeface="Microsoft YaHei" pitchFamily="34" charset="0"/>
+                <a:ea typeface="Microsoft YaHei" pitchFamily="34" charset="-122"/>
+                <a:cs typeface="Microsoft YaHei" pitchFamily="34" charset="-120"/>
+              </a:rPr>
+              <a:t>→ 进行中 / 下一步</a:t>
+            </a:r>
+            <a:endParaRPr lang="en-US" sz="1700" dirty="0"/>
+          </a:p>
+        </p:txBody>
+      </p:sp>
+      <p:sp>
+        <p:nvSpPr>
+          <p:cNvPr id="8" name="Text 6"/>
+          <p:cNvSpPr/>
+          <p:nvPr/>
+        </p:nvSpPr>
+        <p:spPr>
+          <a:xfrm>
+            <a:off x="6537960" y="2286000"/>
+            <a:ext cx="4846320" cy="3566160"/>
+          </a:xfrm>
+          <a:prstGeom prst="rect">
+            <a:avLst/>
+          </a:prstGeom>
+          <a:noFill/>
+          <a:ln/>
+        </p:spPr>
+        <p:txBody>
+          <a:bodyPr wrap="square" rtlCol="0" anchor="t"/>
+          <a:lstStyle/>
+          <a:p>
+            <a:pPr indent="0" marL="0">
+              <a:lnSpc>
+                <a:spcPct val="135000"/>
+              </a:lnSpc>
+              <a:buNone/>
+            </a:pPr>
+            <a:r>
+              <a:rPr lang="en-US" sz="1300" dirty="0">
+                <a:solidFill>
+                  <a:srgbClr val="1F2937"/>
+                </a:solidFill>
+                <a:latin typeface="Microsoft YaHei" pitchFamily="34" charset="0"/>
+                <a:ea typeface="Microsoft YaHei" pitchFamily="34" charset="-122"/>
+                <a:cs typeface="Microsoft YaHei" pitchFamily="34" charset="-120"/>
+              </a:rPr>
+              <a:t>• 接着剥运行时坑:让 /scan 到达 cartographer → SLAM healthy</a:t>
+            </a:r>
+            <a:endParaRPr lang="en-US" sz="1300" dirty="0"/>
+          </a:p>
+          <a:p>
+            <a:pPr indent="0" marL="0">
+              <a:lnSpc>
+                <a:spcPct val="135000"/>
+              </a:lnSpc>
+              <a:buNone/>
+            </a:pPr>
+            <a:r>
+              <a:rPr lang="en-US" sz="1300" dirty="0">
+                <a:solidFill>
+                  <a:srgbClr val="1F2937"/>
+                </a:solidFill>
+                <a:latin typeface="Microsoft YaHei" pitchFamily="34" charset="0"/>
+                <a:ea typeface="Microsoft YaHei" pitchFamily="34" charset="-122"/>
+                <a:cs typeface="Microsoft YaHei" pitchFamily="34" charset="-120"/>
+              </a:rPr>
+              <a:t>• 跑通 exploration,取 frontier_lite 真实指标 + 验证 gbplanner_gain</a:t>
+            </a:r>
+            <a:endParaRPr lang="en-US" sz="1300" dirty="0"/>
+          </a:p>
+          <a:p>
+            <a:pPr indent="0" marL="0">
+              <a:lnSpc>
+                <a:spcPct val="135000"/>
+              </a:lnSpc>
+              <a:buNone/>
+            </a:pPr>
+            <a:r>
+              <a:rPr lang="en-US" sz="1300" dirty="0">
+                <a:solidFill>
+                  <a:srgbClr val="1F2937"/>
+                </a:solidFill>
+                <a:latin typeface="Microsoft YaHei" pitchFamily="34" charset="0"/>
+                <a:ea typeface="Microsoft YaHei" pitchFamily="34" charset="-122"/>
+                <a:cs typeface="Microsoft YaHei" pitchFamily="34" charset="-120"/>
+              </a:rPr>
+              <a:t>• 完整路线:加 3D 雷达 + 起 ros1_bridge 接真版 GBPlanner</a:t>
+            </a:r>
+            <a:endParaRPr lang="en-US" sz="1300" dirty="0"/>
+          </a:p>
+          <a:p>
+            <a:pPr indent="0" marL="0">
+              <a:lnSpc>
+                <a:spcPct val="135000"/>
+              </a:lnSpc>
+              <a:buNone/>
+            </a:pPr>
+            <a:r>
+              <a:rPr lang="en-US" sz="1300" dirty="0">
+                <a:solidFill>
+                  <a:srgbClr val="1F2937"/>
+                </a:solidFill>
+                <a:latin typeface="Microsoft YaHei" pitchFamily="34" charset="0"/>
+                <a:ea typeface="Microsoft YaHei" pitchFamily="34" charset="-122"/>
+                <a:cs typeface="Microsoft YaHei" pitchFamily="34" charset="-120"/>
+              </a:rPr>
+              <a:t>• 同场景量化对比;把 PR + Issue 提交给作者(任务闭环)</a:t>
+            </a:r>
+            <a:endParaRPr lang="en-US" sz="1300" dirty="0"/>
+          </a:p>
+        </p:txBody>
+      </p:sp>
+    </p:spTree>
+  </p:cSld>
+  <p:clrMapOvr>
+    <a:masterClrMapping/>
+  </p:clrMapOvr>
+</p:sld>
+</file>
+
+<file path=ppt/slides/slide11.xml><?xml version="1.0" encoding="utf-8"?>
+<p:sld xmlns:a="http://schemas.openxmlformats.org/drawingml/2006/main" xmlns:r="http://schemas.openxmlformats.org/officeDocument/2006/relationships" xmlns:p="http://schemas.openxmlformats.org/presentationml/2006/main">
+  <p:cSld name="Slide 11">
+    <p:bg>
+      <p:bgPr>
+        <a:solidFill>
+          <a:srgbClr val="1E2761"/>
+        </a:solidFill>
+      </p:bgPr>
+    </p:bg>
+    <p:spTree>
+      <p:nvGrpSpPr>
+        <p:cNvPr id="1" name=""/>
+        <p:cNvGrpSpPr/>
+        <p:nvPr/>
+      </p:nvGrpSpPr>
+      <p:grpSpPr>
+        <a:xfrm>
+          <a:off x="0" y="0"/>
+          <a:ext cx="0" cy="0"/>
+          <a:chOff x="0" y="0"/>
+          <a:chExt cx="0" cy="0"/>
+        </a:xfrm>
+      </p:grpSpPr>
+      <p:sp>
+        <p:nvSpPr>
+          <p:cNvPr id="2" name="Text 0"/>
+          <p:cNvSpPr/>
+          <p:nvPr/>
+        </p:nvSpPr>
+        <p:spPr>
+          <a:xfrm>
+            <a:off x="822960" y="2194560"/>
+            <a:ext cx="10607040" cy="1645920"/>
+          </a:xfrm>
+          <a:prstGeom prst="rect">
+            <a:avLst/>
+          </a:prstGeom>
+          <a:noFill/>
+          <a:ln/>
+        </p:spPr>
+        <p:txBody>
+          <a:bodyPr wrap="square" rtlCol="0" anchor="ctr"/>
+          <a:lstStyle/>
+          <a:p>
+            <a:pPr indent="0" marL="0">
+              <a:lnSpc>
+                <a:spcPct val="115000"/>
+              </a:lnSpc>
+              <a:buNone/>
+            </a:pPr>
+            <a:r>
+              <a:rPr lang="en-US" sz="3200" b="1" dirty="0">
+                <a:solidFill>
+                  <a:srgbClr val="FFFFFF"/>
+                </a:solidFill>
+                <a:latin typeface="Microsoft YaHei" pitchFamily="34" charset="0"/>
+                <a:ea typeface="Microsoft YaHei" pitchFamily="34" charset="-122"/>
+                <a:cs typeface="Microsoft YaHei" pitchFamily="34" charset="-120"/>
+              </a:rPr>
+              <a:t>frontier_lite 闭眼按脚本动;</a:t>
+            </a:r>
+            <a:endParaRPr lang="en-US" sz="3200" dirty="0"/>
+          </a:p>
+          <a:p>
+            <a:pPr indent="0" marL="0">
+              <a:lnSpc>
+                <a:spcPct val="115000"/>
+              </a:lnSpc>
+              <a:buNone/>
+            </a:pPr>
+            <a:r>
+              <a:rPr lang="en-US" sz="3200" b="1" dirty="0">
+                <a:solidFill>
+                  <a:srgbClr val="FFFFFF"/>
+                </a:solidFill>
+                <a:latin typeface="Microsoft YaHei" pitchFamily="34" charset="0"/>
+                <a:ea typeface="Microsoft YaHei" pitchFamily="34" charset="-122"/>
+                <a:cs typeface="Microsoft YaHei" pitchFamily="34" charset="-120"/>
+              </a:rPr>
+              <a:t>GBPlanner 睁眼挑未知最多的路。</a:t>
+            </a:r>
+            <a:endParaRPr lang="en-US" sz="3200" dirty="0"/>
+          </a:p>
+        </p:txBody>
+      </p:sp>
+      <p:sp>
+        <p:nvSpPr>
+          <p:cNvPr id="3" name="Text 1"/>
+          <p:cNvSpPr/>
+          <p:nvPr/>
+        </p:nvSpPr>
+        <p:spPr>
+          <a:xfrm>
+            <a:off x="868680" y="4023360"/>
+            <a:ext cx="10515600" cy="914400"/>
+          </a:xfrm>
+          <a:prstGeom prst="rect">
+            <a:avLst/>
+          </a:prstGeom>
+          <a:noFill/>
+          <a:ln/>
+        </p:spPr>
+        <p:txBody>
+          <a:bodyPr wrap="square" rtlCol="0" anchor="ctr"/>
+          <a:lstStyle/>
+          <a:p>
+            <a:pPr indent="0" marL="0">
+              <a:lnSpc>
+                <a:spcPct val="120000"/>
+              </a:lnSpc>
+              <a:buNone/>
+            </a:pPr>
+            <a:r>
+              <a:rPr lang="en-US" sz="1700" dirty="0">
+                <a:solidFill>
+                  <a:srgbClr val="CADCFC"/>
+                </a:solidFill>
+                <a:latin typeface="Microsoft YaHei" pitchFamily="34" charset="0"/>
+                <a:ea typeface="Microsoft YaHei" pitchFamily="34" charset="-122"/>
+                <a:cs typeface="Microsoft YaHei" pitchFamily="34" charset="-120"/>
+              </a:rPr>
+              <a:t>这几天:看懂了系统、设计清楚了集成、核心算法真跑起来,</a:t>
+            </a:r>
+            <a:endParaRPr lang="en-US" sz="1700" dirty="0"/>
+          </a:p>
+          <a:p>
+            <a:pPr indent="0" marL="0">
+              <a:lnSpc>
+                <a:spcPct val="120000"/>
+              </a:lnSpc>
+              <a:buNone/>
+            </a:pPr>
+            <a:r>
+              <a:rPr lang="en-US" sz="1700" dirty="0">
+                <a:solidFill>
+                  <a:srgbClr val="CADCFC"/>
+                </a:solidFill>
+                <a:latin typeface="Microsoft YaHei" pitchFamily="34" charset="0"/>
+                <a:ea typeface="Microsoft YaHei" pitchFamily="34" charset="-122"/>
+                <a:cs typeface="Microsoft YaHei" pitchFamily="34" charset="-120"/>
+              </a:rPr>
+              <a:t>还把决策内核接进了真实代码、修了一个真 bug、备好了给作者的 PR。</a:t>
+            </a:r>
+            <a:endParaRPr lang="en-US" sz="1700" dirty="0"/>
+          </a:p>
+        </p:txBody>
+      </p:sp>
+    </p:spTree>
+  </p:cSld>
+  <p:clrMapOvr>
+    <a:masterClrMapping/>
+  </p:clrMapOvr>
+</p:sld>
+</file>
+
 <file path=ppt/slides/slide2.xml><?xml version="1.0" encoding="utf-8"?>
 <p:sld xmlns:a="http://schemas.openxmlformats.org/drawingml/2006/main" xmlns:r="http://schemas.openxmlformats.org/officeDocument/2006/relationships" xmlns:p="http://schemas.openxmlformats.org/presentationml/2006/main">
   <p:cSld name="Slide 2">
@@ -4105,7 +4906,7 @@
                 <a:ea typeface="Microsoft YaHei" pitchFamily="34" charset="-122"/>
                 <a:cs typeface="Microsoft YaHei" pitchFamily="34" charset="-120"/>
               </a:rPr>
-              <a:t>一次探索:复现仿真平台(及时止损)</a:t>
+              <a:t>真集成进展:两条腿往前推</a:t>
             </a:r>
             <a:endParaRPr lang="en-US" sz="3000" dirty="0"/>
           </a:p>
@@ -4113,126 +4914,57 @@
       </p:sp>
       <p:sp>
         <p:nvSpPr>
-          <p:cNvPr id="3" name="Shape 1"/>
-          <p:cNvSpPr/>
-          <p:nvPr/>
-        </p:nvSpPr>
-        <p:spPr>
-          <a:xfrm>
-            <a:off x="548640" y="1645920"/>
-            <a:ext cx="11064240" cy="1554480"/>
+          <p:cNvPr id="3" name="Text 1"/>
+          <p:cNvSpPr/>
+          <p:nvPr/>
+        </p:nvSpPr>
+        <p:spPr>
+          <a:xfrm>
+            <a:off x="566928" y="1051560"/>
+            <a:ext cx="10972800" cy="411480"/>
+          </a:xfrm>
+          <a:prstGeom prst="rect">
+            <a:avLst/>
+          </a:prstGeom>
+          <a:noFill/>
+          <a:ln/>
+        </p:spPr>
+        <p:txBody>
+          <a:bodyPr wrap="square" rtlCol="0" anchor="ctr"/>
+          <a:lstStyle/>
+          <a:p>
+            <a:pPr indent="0" marL="0">
+              <a:buNone/>
+            </a:pPr>
+            <a:r>
+              <a:rPr lang="en-US" sz="1500" dirty="0">
+                <a:solidFill>
+                  <a:srgbClr val="6B7280"/>
+                </a:solidFill>
+                <a:latin typeface="Microsoft YaHei" pitchFamily="34" charset="0"/>
+                <a:ea typeface="Microsoft YaHei" pitchFamily="34" charset="-122"/>
+                <a:cs typeface="Microsoft YaHei" pitchFamily="34" charset="-120"/>
+              </a:rPr>
+              <a:t>决策层原型(ROS2 原生)+ 真版 GBPlanner 桥接地基(锁定方案)</a:t>
+            </a:r>
+            <a:endParaRPr lang="en-US" sz="1500" dirty="0"/>
+          </a:p>
+        </p:txBody>
+      </p:sp>
+      <p:sp>
+        <p:nvSpPr>
+          <p:cNvPr id="4" name="Shape 2"/>
+          <p:cNvSpPr/>
+          <p:nvPr/>
+        </p:nvSpPr>
+        <p:spPr>
+          <a:xfrm>
+            <a:off x="548640" y="1600200"/>
+            <a:ext cx="5486400" cy="3657600"/>
           </a:xfrm>
           <a:prstGeom prst="roundRect">
             <a:avLst>
-              <a:gd name="adj" fmla="val 4706"/>
-            </a:avLst>
-          </a:prstGeom>
-          <a:solidFill>
-            <a:srgbClr val="F1F5F9"/>
-          </a:solidFill>
-          <a:ln w="12700">
-            <a:solidFill>
-              <a:srgbClr val="E2E8F0"/>
-            </a:solidFill>
-            <a:prstDash val="solid"/>
-          </a:ln>
-        </p:spPr>
-      </p:sp>
-      <p:sp>
-        <p:nvSpPr>
-          <p:cNvPr id="4" name="Text 2"/>
-          <p:cNvSpPr/>
-          <p:nvPr/>
-        </p:nvSpPr>
-        <p:spPr>
-          <a:xfrm>
-            <a:off x="822960" y="1828800"/>
-            <a:ext cx="10515600" cy="457200"/>
-          </a:xfrm>
-          <a:prstGeom prst="rect">
-            <a:avLst/>
-          </a:prstGeom>
-          <a:noFill/>
-          <a:ln/>
-        </p:spPr>
-        <p:txBody>
-          <a:bodyPr wrap="square" rtlCol="0" anchor="ctr"/>
-          <a:lstStyle/>
-          <a:p>
-            <a:pPr indent="0" marL="0">
-              <a:buNone/>
-            </a:pPr>
-            <a:r>
-              <a:rPr lang="en-US" sz="1600" b="1" dirty="0">
-                <a:solidFill>
-                  <a:srgbClr val="1F2937"/>
-                </a:solidFill>
-                <a:latin typeface="Microsoft YaHei" pitchFamily="34" charset="0"/>
-                <a:ea typeface="Microsoft YaHei" pitchFamily="34" charset="-122"/>
-                <a:cs typeface="Microsoft YaHei" pitchFamily="34" charset="-120"/>
-              </a:rPr>
-              <a:t>我们曾尝试在本机完整复现 world-model 的 9 个 Docker 镜像,以端到端运行平台。</a:t>
-            </a:r>
-            <a:endParaRPr lang="en-US" sz="1600" dirty="0"/>
-          </a:p>
-        </p:txBody>
-      </p:sp>
-      <p:sp>
-        <p:nvSpPr>
-          <p:cNvPr id="5" name="Text 3"/>
-          <p:cNvSpPr/>
-          <p:nvPr/>
-        </p:nvSpPr>
-        <p:spPr>
-          <a:xfrm>
-            <a:off x="822960" y="2331720"/>
-            <a:ext cx="10515600" cy="731520"/>
-          </a:xfrm>
-          <a:prstGeom prst="rect">
-            <a:avLst/>
-          </a:prstGeom>
-          <a:noFill/>
-          <a:ln/>
-        </p:spPr>
-        <p:txBody>
-          <a:bodyPr wrap="square" rtlCol="0" anchor="t"/>
-          <a:lstStyle/>
-          <a:p>
-            <a:pPr indent="0" marL="0">
-              <a:lnSpc>
-                <a:spcPct val="120000"/>
-              </a:lnSpc>
-              <a:buNone/>
-            </a:pPr>
-            <a:r>
-              <a:rPr lang="en-US" sz="1450" dirty="0">
-                <a:solidFill>
-                  <a:srgbClr val="1F2937"/>
-                </a:solidFill>
-                <a:latin typeface="Microsoft YaHei" pitchFamily="34" charset="0"/>
-                <a:ea typeface="Microsoft YaHei" pitchFamily="34" charset="-122"/>
-                <a:cs typeface="Microsoft YaHei" pitchFamily="34" charset="-120"/>
-              </a:rPr>
-              <a:t>但该平台为特定 Linux/CI 环境(Ubuntu 24.04)设计,本机从源码构建遭遇一连串版本兼容问题(编译器、Python、Gazebo、Fast-CDR 等)。</a:t>
-            </a:r>
-            <a:endParaRPr lang="en-US" sz="1450" dirty="0"/>
-          </a:p>
-        </p:txBody>
-      </p:sp>
-      <p:sp>
-        <p:nvSpPr>
-          <p:cNvPr id="6" name="Shape 4"/>
-          <p:cNvSpPr/>
-          <p:nvPr/>
-        </p:nvSpPr>
-        <p:spPr>
-          <a:xfrm>
-            <a:off x="548640" y="3383280"/>
-            <a:ext cx="11064240" cy="2651760"/>
-          </a:xfrm>
-          <a:prstGeom prst="roundRect">
-            <a:avLst>
-              <a:gd name="adj" fmla="val 2759"/>
+              <a:gd name="adj" fmla="val 2000"/>
             </a:avLst>
           </a:prstGeom>
           <a:solidFill>
@@ -4248,14 +4980,14 @@
       </p:sp>
       <p:sp>
         <p:nvSpPr>
-          <p:cNvPr id="7" name="Text 5"/>
-          <p:cNvSpPr/>
-          <p:nvPr/>
-        </p:nvSpPr>
-        <p:spPr>
-          <a:xfrm>
-            <a:off x="822960" y="3566160"/>
-            <a:ext cx="10515600" cy="365760"/>
+          <p:cNvPr id="5" name="Text 3"/>
+          <p:cNvSpPr/>
+          <p:nvPr/>
+        </p:nvSpPr>
+        <p:spPr>
+          <a:xfrm>
+            <a:off x="777240" y="1755648"/>
+            <a:ext cx="5029200" cy="365760"/>
           </a:xfrm>
           <a:prstGeom prst="rect">
             <a:avLst/>
@@ -4271,7 +5003,7 @@
               <a:buNone/>
             </a:pPr>
             <a:r>
-              <a:rPr lang="en-US" sz="1600" b="1" dirty="0">
+              <a:rPr lang="en-US" sz="1500" b="1" dirty="0">
                 <a:solidFill>
                   <a:srgbClr val="16A34A"/>
                 </a:solidFill>
@@ -4279,11 +5011,152 @@
                 <a:ea typeface="Microsoft YaHei" pitchFamily="34" charset="-122"/>
                 <a:cs typeface="Microsoft YaHei" pitchFamily="34" charset="-120"/>
               </a:rPr>
-              <a:t>关键判断 &amp; 调整</a:t>
-            </a:r>
-            <a:endParaRPr lang="en-US" sz="1600" dirty="0"/>
-          </a:p>
-        </p:txBody>
+              <a:t>① 决策层原型:gbplanner_gain</a:t>
+            </a:r>
+            <a:endParaRPr lang="en-US" sz="1500" dirty="0"/>
+          </a:p>
+        </p:txBody>
+      </p:sp>
+      <p:sp>
+        <p:nvSpPr>
+          <p:cNvPr id="6" name="Text 4"/>
+          <p:cNvSpPr/>
+          <p:nvPr/>
+        </p:nvSpPr>
+        <p:spPr>
+          <a:xfrm>
+            <a:off x="777240" y="2194560"/>
+            <a:ext cx="5029200" cy="3017520"/>
+          </a:xfrm>
+          <a:prstGeom prst="rect">
+            <a:avLst/>
+          </a:prstGeom>
+          <a:noFill/>
+          <a:ln/>
+        </p:spPr>
+        <p:txBody>
+          <a:bodyPr wrap="square" rtlCol="0" anchor="t"/>
+          <a:lstStyle/>
+          <a:p>
+            <a:pPr indent="0" marL="0">
+              <a:lnSpc>
+                <a:spcPct val="125000"/>
+              </a:lnSpc>
+              <a:buNone/>
+            </a:pPr>
+            <a:r>
+              <a:rPr lang="en-US" sz="1300" dirty="0">
+                <a:solidFill>
+                  <a:srgbClr val="1F2937"/>
+                </a:solidFill>
+                <a:latin typeface="Microsoft YaHei" pitchFamily="34" charset="0"/>
+                <a:ea typeface="Microsoft YaHei" pitchFamily="34" charset="-122"/>
+                <a:cs typeface="Microsoft YaHei" pitchFamily="34" charset="-120"/>
+              </a:rPr>
+              <a:t>在 world-model 真实代码里新增可选策略(加法,不动 frontier_lite):
+</a:t>
+            </a:r>
+            <a:pPr indent="0" marL="0">
+              <a:lnSpc>
+                <a:spcPct val="125000"/>
+              </a:lnSpc>
+              <a:buNone/>
+            </a:pPr>
+            <a:r>
+              <a:rPr lang="en-US" sz="1300" dirty="0">
+                <a:solidFill>
+                  <a:srgbClr val="1F2937"/>
+                </a:solidFill>
+                <a:latin typeface="Microsoft YaHei" pitchFamily="34" charset="0"/>
+                <a:ea typeface="Microsoft YaHei" pitchFamily="34" charset="-122"/>
+                <a:cs typeface="Microsoft YaHei" pitchFamily="34" charset="-120"/>
+              </a:rPr>
+              <a:t>• 订阅占据栅格 /map → 24 方向光线投射数未知栅格(2D 体积增益)→ 减转向惩罚选向
+</a:t>
+            </a:r>
+            <a:pPr indent="0" marL="0">
+              <a:lnSpc>
+                <a:spcPct val="125000"/>
+              </a:lnSpc>
+              <a:buNone/>
+            </a:pPr>
+            <a:r>
+              <a:rPr lang="en-US" sz="1300" b="1" dirty="0">
+                <a:solidFill>
+                  <a:srgbClr val="16A34A"/>
+                </a:solidFill>
+                <a:latin typeface="Microsoft YaHei" pitchFamily="34" charset="0"/>
+                <a:ea typeface="Microsoft YaHei" pitchFamily="34" charset="-122"/>
+                <a:cs typeface="Microsoft YaHei" pitchFamily="34" charset="-120"/>
+              </a:rPr>
+              <a:t>• 把 pattern[i%3] 脚本循环换成看地图挑未知最多方向
+</a:t>
+            </a:r>
+            <a:pPr indent="0" marL="0">
+              <a:lnSpc>
+                <a:spcPct val="125000"/>
+              </a:lnSpc>
+              <a:buNone/>
+            </a:pPr>
+            <a:r>
+              <a:rPr lang="en-US" sz="1250" dirty="0">
+                <a:solidFill>
+                  <a:srgbClr val="1F2937"/>
+                </a:solidFill>
+                <a:latin typeface="Microsoft YaHei" pitchFamily="34" charset="0"/>
+                <a:ea typeface="Microsoft YaHei" pitchFamily="34" charset="-122"/>
+                <a:cs typeface="Microsoft YaHei" pitchFamily="34" charset="-120"/>
+              </a:rPr>
+              <a:t>验证:go build/vet/test + 两策略 py_compile 全过
+</a:t>
+            </a:r>
+            <a:pPr indent="0" marL="0">
+              <a:lnSpc>
+                <a:spcPct val="125000"/>
+              </a:lnSpc>
+              <a:buNone/>
+            </a:pPr>
+            <a:r>
+              <a:rPr lang="en-US" sz="1200" i="1" dirty="0">
+                <a:solidFill>
+                  <a:srgbClr val="B45309"/>
+                </a:solidFill>
+                <a:latin typeface="Microsoft YaHei" pitchFamily="34" charset="0"/>
+                <a:ea typeface="Microsoft YaHei" pitchFamily="34" charset="-122"/>
+                <a:cs typeface="Microsoft YaHei" pitchFamily="34" charset="-120"/>
+              </a:rPr>
+              <a:t>边界:2D 原型,非完整 ROS1 GBPlanner</a:t>
+            </a:r>
+            <a:endParaRPr lang="en-US" sz="1300" dirty="0"/>
+          </a:p>
+        </p:txBody>
+      </p:sp>
+      <p:sp>
+        <p:nvSpPr>
+          <p:cNvPr id="7" name="Shape 5"/>
+          <p:cNvSpPr/>
+          <p:nvPr/>
+        </p:nvSpPr>
+        <p:spPr>
+          <a:xfrm>
+            <a:off x="6309360" y="1600200"/>
+            <a:ext cx="5303520" cy="3657600"/>
+          </a:xfrm>
+          <a:prstGeom prst="roundRect">
+            <a:avLst>
+              <a:gd name="adj" fmla="val 2000"/>
+            </a:avLst>
+          </a:prstGeom>
+          <a:solidFill>
+            <a:srgbClr val="EFF6FF"/>
+          </a:solidFill>
+          <a:ln w="12700">
+            <a:solidFill>
+              <a:srgbClr val="E2E8F0"/>
+            </a:solidFill>
+            <a:prstDash val="solid"/>
+          </a:ln>
+        </p:spPr>
       </p:sp>
       <p:sp>
         <p:nvSpPr>
@@ -4293,8 +5166,8 @@
         </p:nvSpPr>
         <p:spPr>
           <a:xfrm>
-            <a:off x="822960" y="4023360"/>
-            <a:ext cx="10515600" cy="1828800"/>
+            <a:off x="6537960" y="1755648"/>
+            <a:ext cx="4846320" cy="365760"/>
           </a:xfrm>
           <a:prstGeom prst="rect">
             <a:avLst/>
@@ -4303,17 +5176,56 @@
           <a:ln/>
         </p:spPr>
         <p:txBody>
+          <a:bodyPr wrap="square" rtlCol="0" anchor="ctr"/>
+          <a:lstStyle/>
+          <a:p>
+            <a:pPr indent="0" marL="0">
+              <a:buNone/>
+            </a:pPr>
+            <a:r>
+              <a:rPr lang="en-US" sz="1500" b="1" dirty="0">
+                <a:solidFill>
+                  <a:srgbClr val="1E2761"/>
+                </a:solidFill>
+                <a:latin typeface="Microsoft YaHei" pitchFamily="34" charset="0"/>
+                <a:ea typeface="Microsoft YaHei" pitchFamily="34" charset="-122"/>
+                <a:cs typeface="Microsoft YaHei" pitchFamily="34" charset="-120"/>
+              </a:rPr>
+              <a:t>② 真版桥接地基:ros1_bridge</a:t>
+            </a:r>
+            <a:endParaRPr lang="en-US" sz="1500" dirty="0"/>
+          </a:p>
+        </p:txBody>
+      </p:sp>
+      <p:sp>
+        <p:nvSpPr>
+          <p:cNvPr id="9" name="Text 7"/>
+          <p:cNvSpPr/>
+          <p:nvPr/>
+        </p:nvSpPr>
+        <p:spPr>
+          <a:xfrm>
+            <a:off x="6537960" y="2194560"/>
+            <a:ext cx="4846320" cy="3017520"/>
+          </a:xfrm>
+          <a:prstGeom prst="rect">
+            <a:avLst/>
+          </a:prstGeom>
+          <a:noFill/>
+          <a:ln/>
+        </p:spPr>
+        <p:txBody>
           <a:bodyPr wrap="square" rtlCol="0" anchor="t"/>
           <a:lstStyle/>
           <a:p>
             <a:pPr indent="0" marL="0">
               <a:lnSpc>
-                <a:spcPct val="130000"/>
-              </a:lnSpc>
-              <a:buNone/>
-            </a:pPr>
-            <a:r>
-              <a:rPr lang="en-US" sz="1450" dirty="0">
+                <a:spcPct val="122000"/>
+              </a:lnSpc>
+              <a:buNone/>
+            </a:pPr>
+            <a:r>
+              <a:rPr lang="en-US" sz="1300" dirty="0">
                 <a:solidFill>
                   <a:srgbClr val="1F2937"/>
                 </a:solidFill>
@@ -4321,19 +5233,17 @@
                 <a:ea typeface="Microsoft YaHei" pitchFamily="34" charset="-122"/>
                 <a:cs typeface="Microsoft YaHei" pitchFamily="34" charset="-120"/>
               </a:rPr>
-              <a:t>• 复现整个平台并非本任务核心——核心是算法理解 + 集成设计。</a:t>
-            </a:r>
-            <a:endParaRPr lang="en-US" sz="1450" dirty="0"/>
-          </a:p>
-          <a:p>
-            <a:pPr indent="0" marL="0">
-              <a:lnSpc>
-                <a:spcPct val="130000"/>
-              </a:lnSpc>
-              <a:buNone/>
-            </a:pPr>
-            <a:r>
-              <a:rPr lang="en-US" sz="1450" dirty="0">
+              <a:t>从 gbplanner-ref 源码逐条证实真版 GBPlanner 的 I/O 契约:
+</a:t>
+            </a:r>
+            <a:pPr indent="0" marL="0">
+              <a:lnSpc>
+                <a:spcPct val="122000"/>
+              </a:lnSpc>
+              <a:buNone/>
+            </a:pPr>
+            <a:r>
+              <a:rPr lang="en-US" sz="1300" dirty="0">
                 <a:solidFill>
                   <a:srgbClr val="1F2937"/>
                 </a:solidFill>
@@ -4341,19 +5251,17 @@
                 <a:ea typeface="Microsoft YaHei" pitchFamily="34" charset="-122"/>
                 <a:cs typeface="Microsoft YaHei" pitchFamily="34" charset="-120"/>
               </a:rPr>
-              <a:t>• 据此及时调整方向:聚焦算法本身,靠读源码论证缺陷、设计集成、让核心算法真跑起来。</a:t>
-            </a:r>
-            <a:endParaRPr lang="en-US" sz="1450" dirty="0"/>
-          </a:p>
-          <a:p>
-            <a:pPr indent="0" marL="0">
-              <a:lnSpc>
-                <a:spcPct val="130000"/>
-              </a:lnSpc>
-              <a:buNone/>
-            </a:pPr>
-            <a:r>
-              <a:rPr lang="en-US" sz="1450" dirty="0">
+              <a:t>• 进:点云 PointCloud2 + 里程计 + TF(标准类型)
+</a:t>
+            </a:r>
+            <a:pPr indent="0" marL="0">
+              <a:lnSpc>
+                <a:spcPct val="122000"/>
+              </a:lnSpc>
+              <a:buNone/>
+            </a:pPr>
+            <a:r>
+              <a:rPr lang="en-US" sz="1300" dirty="0">
                 <a:solidFill>
                   <a:srgbClr val="1F2937"/>
                 </a:solidFill>
@@ -4361,9 +5269,111 @@
                 <a:ea typeface="Microsoft YaHei" pitchFamily="34" charset="-122"/>
                 <a:cs typeface="Microsoft YaHei" pitchFamily="34" charset="-120"/>
               </a:rPr>
-              <a:t>• 教训:别为复现别人的基础设施过度投入;换 MacBook 也不解决(同样用 Docker/Linux,Apple 芯片反而更难)。</a:t>
-            </a:r>
-            <a:endParaRPr lang="en-US" sz="1450" dirty="0"/>
+              <a:t>• 出:command/trajectory(标准 MultiDOFJointTrajectory)
+</a:t>
+            </a:r>
+            <a:pPr indent="0" marL="0">
+              <a:lnSpc>
+                <a:spcPct val="122000"/>
+              </a:lnSpc>
+              <a:buNone/>
+            </a:pPr>
+            <a:r>
+              <a:rPr lang="en-US" sz="1300" b="1" dirty="0">
+                <a:solidFill>
+                  <a:srgbClr val="1E2761"/>
+                </a:solidFill>
+                <a:latin typeface="Microsoft YaHei" pitchFamily="34" charset="0"/>
+                <a:ea typeface="Microsoft YaHei" pitchFamily="34" charset="-122"/>
+                <a:cs typeface="Microsoft YaHei" pitchFamily="34" charset="-120"/>
+              </a:rPr>
+              <a:t>• 关键去风险:自定义 planner_msgs 留 ROS1 内,跨桥全是标准类型 → ros1_bridge 开箱
+</a:t>
+            </a:r>
+            <a:pPr indent="0" marL="0">
+              <a:lnSpc>
+                <a:spcPct val="122000"/>
+              </a:lnSpc>
+              <a:buNone/>
+            </a:pPr>
+            <a:r>
+              <a:rPr lang="en-US" sz="1250" dirty="0">
+                <a:solidFill>
+                  <a:srgbClr val="1F2937"/>
+                </a:solidFill>
+                <a:latin typeface="Microsoft YaHei" pitchFamily="34" charset="0"/>
+                <a:ea typeface="Microsoft YaHei" pitchFamily="34" charset="-122"/>
+                <a:cs typeface="Microsoft YaHei" pitchFamily="34" charset="-120"/>
+              </a:rPr>
+              <a:t>已产出:桥接话题映射 + ROS2 出口适配器(轨迹→intent,py_compile 过)</a:t>
+            </a:r>
+            <a:endParaRPr lang="en-US" sz="1300" dirty="0"/>
+          </a:p>
+        </p:txBody>
+      </p:sp>
+      <p:sp>
+        <p:nvSpPr>
+          <p:cNvPr id="10" name="Shape 8"/>
+          <p:cNvSpPr/>
+          <p:nvPr/>
+        </p:nvSpPr>
+        <p:spPr>
+          <a:xfrm>
+            <a:off x="548640" y="5440680"/>
+            <a:ext cx="11064240" cy="640080"/>
+          </a:xfrm>
+          <a:prstGeom prst="roundRect">
+            <a:avLst>
+              <a:gd name="adj" fmla="val 11429"/>
+            </a:avLst>
+          </a:prstGeom>
+          <a:solidFill>
+            <a:srgbClr val="FFF7ED"/>
+          </a:solidFill>
+          <a:ln w="12700">
+            <a:solidFill>
+              <a:srgbClr val="E2E8F0"/>
+            </a:solidFill>
+            <a:prstDash val="solid"/>
+          </a:ln>
+        </p:spPr>
+      </p:sp>
+      <p:sp>
+        <p:nvSpPr>
+          <p:cNvPr id="11" name="Text 9"/>
+          <p:cNvSpPr/>
+          <p:nvPr/>
+        </p:nvSpPr>
+        <p:spPr>
+          <a:xfrm>
+            <a:off x="777240" y="5532120"/>
+            <a:ext cx="10607040" cy="457200"/>
+          </a:xfrm>
+          <a:prstGeom prst="rect">
+            <a:avLst/>
+          </a:prstGeom>
+          <a:noFill/>
+          <a:ln/>
+        </p:spPr>
+        <p:txBody>
+          <a:bodyPr wrap="square" rtlCol="0" anchor="t"/>
+          <a:lstStyle/>
+          <a:p>
+            <a:pPr indent="0" marL="0">
+              <a:buNone/>
+            </a:pPr>
+            <a:r>
+              <a:rPr lang="en-US" sz="1300" dirty="0">
+                <a:solidFill>
+                  <a:srgbClr val="B45309"/>
+                </a:solidFill>
+                <a:latin typeface="Microsoft YaHei" pitchFamily="34" charset="0"/>
+                <a:ea typeface="Microsoft YaHei" pitchFamily="34" charset="-122"/>
+                <a:cs typeface="Microsoft YaHei" pitchFamily="34" charset="-120"/>
+              </a:rPr>
+              <a:t>诚实边界:完整端到端(加 3D 雷达 + 起桥 + 两侧同跑)是后续重活,受 world-model 运行时阻塞(见下页)。</a:t>
+            </a:r>
+            <a:endParaRPr lang="en-US" sz="1300" dirty="0"/>
           </a:p>
         </p:txBody>
       </p:sp>
@@ -4432,7 +5442,7 @@
                 <a:ea typeface="Microsoft YaHei" pitchFamily="34" charset="-122"/>
                 <a:cs typeface="Microsoft YaHei" pitchFamily="34" charset="-120"/>
               </a:rPr>
-              <a:t>当前状态与下一步</a:t>
+              <a:t>工程战果:连修 3 个 humble 真 bug,把平台往前推</a:t>
             </a:r>
             <a:endParaRPr lang="en-US" sz="3000" dirty="0"/>
           </a:p>
@@ -4440,14 +5450,53 @@
       </p:sp>
       <p:sp>
         <p:nvSpPr>
-          <p:cNvPr id="3" name="Shape 1"/>
+          <p:cNvPr id="3" name="Text 1"/>
+          <p:cNvSpPr/>
+          <p:nvPr/>
+        </p:nvSpPr>
+        <p:spPr>
+          <a:xfrm>
+            <a:off x="566928" y="1051560"/>
+            <a:ext cx="10972800" cy="411480"/>
+          </a:xfrm>
+          <a:prstGeom prst="rect">
+            <a:avLst/>
+          </a:prstGeom>
+          <a:noFill/>
+          <a:ln/>
+        </p:spPr>
+        <p:txBody>
+          <a:bodyPr wrap="square" rtlCol="0" anchor="ctr"/>
+          <a:lstStyle/>
+          <a:p>
+            <a:pPr indent="0" marL="0">
+              <a:buNone/>
+            </a:pPr>
+            <a:r>
+              <a:rPr lang="en-US" sz="1500" dirty="0">
+                <a:solidFill>
+                  <a:srgbClr val="6B7280"/>
+                </a:solidFill>
+                <a:latin typeface="Microsoft YaHei" pitchFamily="34" charset="0"/>
+                <a:ea typeface="Microsoft YaHei" pitchFamily="34" charset="-122"/>
+                <a:cs typeface="Microsoft YaHei" pitchFamily="34" charset="-120"/>
+              </a:rPr>
+              <a:t>只信真实产物(docker images / 日志 / py_compile),不信退出码</a:t>
+            </a:r>
+            <a:endParaRPr lang="en-US" sz="1500" dirty="0"/>
+          </a:p>
+        </p:txBody>
+      </p:sp>
+      <p:sp>
+        <p:nvSpPr>
+          <p:cNvPr id="4" name="Shape 2"/>
           <p:cNvSpPr/>
           <p:nvPr/>
         </p:nvSpPr>
         <p:spPr>
           <a:xfrm>
             <a:off x="548640" y="1645920"/>
-            <a:ext cx="5486400" cy="4389120"/>
+            <a:ext cx="6766560" cy="4389120"/>
           </a:xfrm>
           <a:prstGeom prst="roundRect">
             <a:avLst>
@@ -4455,7 +5504,7 @@
             </a:avLst>
           </a:prstGeom>
           <a:solidFill>
-            <a:srgbClr val="F0FDF4"/>
+            <a:srgbClr val="0F172A"/>
           </a:solidFill>
           <a:ln w="12700">
             <a:solidFill>
@@ -4467,14 +5516,14 @@
       </p:sp>
       <p:sp>
         <p:nvSpPr>
-          <p:cNvPr id="4" name="Text 2"/>
-          <p:cNvSpPr/>
-          <p:nvPr/>
-        </p:nvSpPr>
-        <p:spPr>
-          <a:xfrm>
-            <a:off x="777240" y="1828800"/>
-            <a:ext cx="5029200" cy="365760"/>
+          <p:cNvPr id="5" name="Text 3"/>
+          <p:cNvSpPr/>
+          <p:nvPr/>
+        </p:nvSpPr>
+        <p:spPr>
+          <a:xfrm>
+            <a:off x="777240" y="1810512"/>
+            <a:ext cx="6309360" cy="365760"/>
           </a:xfrm>
           <a:prstGeom prst="rect">
             <a:avLst/>
@@ -4490,30 +5539,30 @@
               <a:buNone/>
             </a:pPr>
             <a:r>
-              <a:rPr lang="en-US" sz="1700" b="1" dirty="0">
-                <a:solidFill>
-                  <a:srgbClr val="16A34A"/>
-                </a:solidFill>
-                <a:latin typeface="Microsoft YaHei" pitchFamily="34" charset="0"/>
-                <a:ea typeface="Microsoft YaHei" pitchFamily="34" charset="-122"/>
-                <a:cs typeface="Microsoft YaHei" pitchFamily="34" charset="-120"/>
-              </a:rPr>
-              <a:t>✓ 已完成(扎实)</a:t>
-            </a:r>
-            <a:endParaRPr lang="en-US" sz="1700" dirty="0"/>
-          </a:p>
-        </p:txBody>
-      </p:sp>
-      <p:sp>
-        <p:nvSpPr>
-          <p:cNvPr id="5" name="Text 3"/>
-          <p:cNvSpPr/>
-          <p:nvPr/>
-        </p:nvSpPr>
-        <p:spPr>
-          <a:xfrm>
-            <a:off x="777240" y="2286000"/>
-            <a:ext cx="5029200" cy="3566160"/>
+              <a:rPr lang="en-US" sz="1450" b="1" dirty="0">
+                <a:solidFill>
+                  <a:srgbClr val="CADCFC"/>
+                </a:solidFill>
+                <a:latin typeface="Microsoft YaHei" pitchFamily="34" charset="0"/>
+                <a:ea typeface="Microsoft YaHei" pitchFamily="34" charset="-122"/>
+                <a:cs typeface="Microsoft YaHei" pitchFamily="34" charset="-120"/>
+              </a:rPr>
+              <a:t>给 world-model 作者的真实可提交修复(均有实测证据)</a:t>
+            </a:r>
+            <a:endParaRPr lang="en-US" sz="1450" dirty="0"/>
+          </a:p>
+        </p:txBody>
+      </p:sp>
+      <p:sp>
+        <p:nvSpPr>
+          <p:cNvPr id="6" name="Text 4"/>
+          <p:cNvSpPr/>
+          <p:nvPr/>
+        </p:nvSpPr>
+        <p:spPr>
+          <a:xfrm>
+            <a:off x="777240" y="2240280"/>
+            <a:ext cx="6309360" cy="3657600"/>
           </a:xfrm>
           <a:prstGeom prst="rect">
             <a:avLst/>
@@ -4527,119 +5576,95 @@
           <a:p>
             <a:pPr indent="0" marL="0">
               <a:lnSpc>
-                <a:spcPct val="145000"/>
-              </a:lnSpc>
-              <a:buNone/>
-            </a:pPr>
-            <a:r>
-              <a:rPr lang="en-US" sz="1450" dirty="0">
-                <a:solidFill>
-                  <a:srgbClr val="1F2937"/>
-                </a:solidFill>
-                <a:latin typeface="Microsoft YaHei" pitchFamily="34" charset="0"/>
-                <a:ea typeface="Microsoft YaHei" pitchFamily="34" charset="-122"/>
-                <a:cs typeface="Microsoft YaHei" pitchFamily="34" charset="-120"/>
-              </a:rPr>
-              <a:t>• 摸清两个系统 + 三道鸿沟,定下桥接方案</a:t>
-            </a:r>
-            <a:endParaRPr lang="en-US" sz="1450" dirty="0"/>
-          </a:p>
-          <a:p>
-            <a:pPr indent="0" marL="0">
-              <a:lnSpc>
-                <a:spcPct val="145000"/>
-              </a:lnSpc>
-              <a:buNone/>
-            </a:pPr>
-            <a:r>
-              <a:rPr lang="en-US" sz="1450" dirty="0">
-                <a:solidFill>
-                  <a:srgbClr val="1F2937"/>
-                </a:solidFill>
-                <a:latin typeface="Microsoft YaHei" pitchFamily="34" charset="0"/>
-                <a:ea typeface="Microsoft YaHei" pitchFamily="34" charset="-122"/>
-                <a:cs typeface="Microsoft YaHei" pitchFamily="34" charset="-120"/>
-              </a:rPr>
-              <a:t>• 算法核心可运行:体积增益决策演示 + 单测</a:t>
-            </a:r>
-            <a:endParaRPr lang="en-US" sz="1450" dirty="0"/>
-          </a:p>
-          <a:p>
-            <a:pPr indent="0" marL="0">
-              <a:lnSpc>
-                <a:spcPct val="145000"/>
-              </a:lnSpc>
-              <a:buNone/>
-            </a:pPr>
-            <a:r>
-              <a:rPr lang="en-US" sz="1450" dirty="0">
-                <a:solidFill>
-                  <a:srgbClr val="1F2937"/>
-                </a:solidFill>
-                <a:latin typeface="Microsoft YaHei" pitchFamily="34" charset="0"/>
-                <a:ea typeface="Microsoft YaHei" pitchFamily="34" charset="-122"/>
-                <a:cs typeface="Microsoft YaHei" pitchFamily="34" charset="-120"/>
-              </a:rPr>
-              <a:t>• 集成机制设计:精确接口 + 三步加法</a:t>
-            </a:r>
-            <a:endParaRPr lang="en-US" sz="1450" dirty="0"/>
-          </a:p>
-          <a:p>
-            <a:pPr indent="0" marL="0">
-              <a:lnSpc>
-                <a:spcPct val="145000"/>
-              </a:lnSpc>
-              <a:buNone/>
-            </a:pPr>
-            <a:r>
-              <a:rPr lang="en-US" sz="1450" dirty="0">
-                <a:solidFill>
-                  <a:srgbClr val="1F2937"/>
-                </a:solidFill>
-                <a:latin typeface="Microsoft YaHei" pitchFamily="34" charset="0"/>
-                <a:ea typeface="Microsoft YaHei" pitchFamily="34" charset="-122"/>
-                <a:cs typeface="Microsoft YaHei" pitchFamily="34" charset="-120"/>
-              </a:rPr>
-              <a:t>• 缺陷论证:frontier_lite 是脚本(代码铁证)</a:t>
-            </a:r>
-            <a:endParaRPr lang="en-US" sz="1450" dirty="0"/>
-          </a:p>
-          <a:p>
-            <a:pPr indent="0" marL="0">
-              <a:lnSpc>
-                <a:spcPct val="145000"/>
-              </a:lnSpc>
-              <a:buNone/>
-            </a:pPr>
-            <a:r>
-              <a:rPr lang="en-US" sz="1450" dirty="0">
-                <a:solidFill>
-                  <a:srgbClr val="1F2937"/>
-                </a:solidFill>
-                <a:latin typeface="Microsoft YaHei" pitchFamily="34" charset="0"/>
-                <a:ea typeface="Microsoft YaHei" pitchFamily="34" charset="-122"/>
-                <a:cs typeface="Microsoft YaHei" pitchFamily="34" charset="-120"/>
-              </a:rPr>
-              <a:t>• 完整文档 + GitHub 私有仓 + 可复现脚本</a:t>
-            </a:r>
-            <a:endParaRPr lang="en-US" sz="1450" dirty="0"/>
-          </a:p>
-        </p:txBody>
-      </p:sp>
-      <p:sp>
-        <p:nvSpPr>
-          <p:cNvPr id="6" name="Shape 4"/>
-          <p:cNvSpPr/>
-          <p:nvPr/>
-        </p:nvSpPr>
-        <p:spPr>
-          <a:xfrm>
-            <a:off x="6309360" y="1645920"/>
-            <a:ext cx="5303520" cy="4389120"/>
+                <a:spcPct val="120000"/>
+              </a:lnSpc>
+              <a:buNone/>
+            </a:pPr>
+            <a:r>
+              <a:rPr lang="en-US" sz="1300" dirty="0">
+                <a:solidFill>
+                  <a:srgbClr val="A7F3D0"/>
+                </a:solidFill>
+                <a:latin typeface="Microsoft YaHei" pitchFamily="34" charset="0"/>
+                <a:ea typeface="Microsoft YaHei" pitchFamily="34" charset="-122"/>
+                <a:cs typeface="Microsoft YaHei" pitchFamily="34" charset="-120"/>
+              </a:rPr>
+              <a:t>① tomllib(头号):SLAM 在 Py3.10 一启动就崩(tomllib 是 3.11+)
+   → 回退 tomli;实测重跑后 SLAM 越过此崩溃
+</a:t>
+            </a:r>
+            <a:pPr indent="0" marL="0">
+              <a:lnSpc>
+                <a:spcPct val="120000"/>
+              </a:lnSpc>
+              <a:buNone/>
+            </a:pPr>
+            <a:r>
+              <a:rPr lang="en-US" sz="1300" dirty="0">
+                <a:solidFill>
+                  <a:srgbClr val="A7F3D0"/>
+                </a:solidFill>
+                <a:latin typeface="Microsoft YaHei" pitchFamily="34" charset="0"/>
+                <a:ea typeface="Microsoft YaHei" pitchFamily="34" charset="-122"/>
+                <a:cs typeface="Microsoft YaHei" pitchFamily="34" charset="-120"/>
+              </a:rPr>
+              <a:t>② 空 launch 参数:humble 拒绝空值 name:= → SLAM 起不来
+   → 跳过空参;实测 cartographer 节点真正运行起来
+</a:t>
+            </a:r>
+            <a:pPr indent="0" marL="0">
+              <a:lnSpc>
+                <a:spcPct val="120000"/>
+              </a:lnSpc>
+              <a:buNone/>
+            </a:pPr>
+            <a:r>
+              <a:rPr lang="en-US" sz="1300" dirty="0">
+                <a:solidFill>
+                  <a:srgbClr val="CADCFC"/>
+                </a:solidFill>
+                <a:latin typeface="Microsoft YaHei" pitchFamily="34" charset="0"/>
+                <a:ea typeface="Microsoft YaHei" pitchFamily="34" charset="-122"/>
+                <a:cs typeface="Microsoft YaHei" pitchFamily="34" charset="-120"/>
+              </a:rPr>
+              <a:t>③ 模板 %% 编译 bug:生成脚本无法编译 → 改单 %(独立次要)
+</a:t>
+            </a:r>
+            <a:pPr indent="0" marL="0">
+              <a:lnSpc>
+                <a:spcPct val="120000"/>
+              </a:lnSpc>
+              <a:buNone/>
+            </a:pPr>
+            <a:r>
+              <a:rPr lang="en-US" sz="1350" b="1" dirty="0">
+                <a:solidFill>
+                  <a:srgbClr val="FFFFFF"/>
+                </a:solidFill>
+                <a:latin typeface="Microsoft YaHei" pitchFamily="34" charset="0"/>
+                <a:ea typeface="Microsoft YaHei" pitchFamily="34" charset="-122"/>
+                <a:cs typeface="Microsoft YaHei" pitchFamily="34" charset="-120"/>
+              </a:rPr>
+              <a:t>成效:world-model 从「装不起来」→ 9 镜像齐 → SLAM 从「一崩」推进到「cartographer 真运行,只差激光数据」</a:t>
+            </a:r>
+            <a:endParaRPr lang="en-US" sz="1300" dirty="0"/>
+          </a:p>
+        </p:txBody>
+      </p:sp>
+      <p:sp>
+        <p:nvSpPr>
+          <p:cNvPr id="7" name="Shape 5"/>
+          <p:cNvSpPr/>
+          <p:nvPr/>
+        </p:nvSpPr>
+        <p:spPr>
+          <a:xfrm>
+            <a:off x="7589520" y="1645920"/>
+            <a:ext cx="4023360" cy="4389120"/>
           </a:xfrm>
           <a:prstGeom prst="roundRect">
             <a:avLst>
-              <a:gd name="adj" fmla="val 1667"/>
+              <a:gd name="adj" fmla="val 1818"/>
             </a:avLst>
           </a:prstGeom>
           <a:solidFill>
@@ -4655,14 +5680,14 @@
       </p:sp>
       <p:sp>
         <p:nvSpPr>
-          <p:cNvPr id="7" name="Text 5"/>
-          <p:cNvSpPr/>
-          <p:nvPr/>
-        </p:nvSpPr>
-        <p:spPr>
-          <a:xfrm>
-            <a:off x="6537960" y="1828800"/>
-            <a:ext cx="4846320" cy="365760"/>
+          <p:cNvPr id="8" name="Text 6"/>
+          <p:cNvSpPr/>
+          <p:nvPr/>
+        </p:nvSpPr>
+        <p:spPr>
+          <a:xfrm>
+            <a:off x="7818120" y="1810512"/>
+            <a:ext cx="3566160" cy="365760"/>
           </a:xfrm>
           <a:prstGeom prst="rect">
             <a:avLst/>
@@ -4678,7 +5703,7 @@
               <a:buNone/>
             </a:pPr>
             <a:r>
-              <a:rPr lang="en-US" sz="1700" b="1" dirty="0">
+              <a:rPr lang="en-US" sz="1450" b="1" dirty="0">
                 <a:solidFill>
                   <a:srgbClr val="1E2761"/>
                 </a:solidFill>
@@ -4686,22 +5711,22 @@
                 <a:ea typeface="Microsoft YaHei" pitchFamily="34" charset="-122"/>
                 <a:cs typeface="Microsoft YaHei" pitchFamily="34" charset="-120"/>
               </a:rPr>
-              <a:t>→ 进行中 / 下一步</a:t>
-            </a:r>
-            <a:endParaRPr lang="en-US" sz="1700" dirty="0"/>
-          </a:p>
-        </p:txBody>
-      </p:sp>
-      <p:sp>
-        <p:nvSpPr>
-          <p:cNvPr id="8" name="Text 6"/>
-          <p:cNvSpPr/>
-          <p:nvPr/>
-        </p:nvSpPr>
-        <p:spPr>
-          <a:xfrm>
-            <a:off x="6537960" y="2286000"/>
-            <a:ext cx="4846320" cy="3566160"/>
+              <a:t>PR + Issue 已备好</a:t>
+            </a:r>
+            <a:endParaRPr lang="en-US" sz="1450" dirty="0"/>
+          </a:p>
+        </p:txBody>
+      </p:sp>
+      <p:sp>
+        <p:nvSpPr>
+          <p:cNvPr id="9" name="Text 7"/>
+          <p:cNvSpPr/>
+          <p:nvPr/>
+        </p:nvSpPr>
+        <p:spPr>
+          <a:xfrm>
+            <a:off x="7818120" y="2240280"/>
+            <a:ext cx="3566160" cy="3657600"/>
           </a:xfrm>
           <a:prstGeom prst="rect">
             <a:avLst/>
@@ -4715,12 +5740,12 @@
           <a:p>
             <a:pPr indent="0" marL="0">
               <a:lnSpc>
-                <a:spcPct val="145000"/>
-              </a:lnSpc>
-              <a:buNone/>
-            </a:pPr>
-            <a:r>
-              <a:rPr lang="en-US" sz="1450" dirty="0">
+                <a:spcPct val="125000"/>
+              </a:lnSpc>
+              <a:buNone/>
+            </a:pPr>
+            <a:r>
+              <a:rPr lang="en-US" sz="1300" b="1" dirty="0">
                 <a:solidFill>
                   <a:srgbClr val="1F2937"/>
                 </a:solidFill>
@@ -4728,19 +5753,17 @@
                 <a:ea typeface="Microsoft YaHei" pitchFamily="34" charset="-122"/>
                 <a:cs typeface="Microsoft YaHei" pitchFamily="34" charset="-120"/>
               </a:rPr>
-              <a:t>• 给仿真无人机加 3D 雷达 + 3D 建图</a:t>
-            </a:r>
-            <a:endParaRPr lang="en-US" sz="1450" dirty="0"/>
-          </a:p>
-          <a:p>
-            <a:pPr indent="0" marL="0">
-              <a:lnSpc>
-                <a:spcPct val="145000"/>
-              </a:lnSpc>
-              <a:buNone/>
-            </a:pPr>
-            <a:r>
-              <a:rPr lang="en-US" sz="1450" dirty="0">
+              <a:t>1 个 PR(4 commit:3 fix + 1 feat)+ 1 个 Issue
+</a:t>
+            </a:r>
+            <a:pPr indent="0" marL="0">
+              <a:lnSpc>
+                <a:spcPct val="125000"/>
+              </a:lnSpc>
+              <a:buNone/>
+            </a:pPr>
+            <a:r>
+              <a:rPr lang="en-US" sz="1250" dirty="0">
                 <a:solidFill>
                   <a:srgbClr val="1F2937"/>
                 </a:solidFill>
@@ -4748,19 +5771,17 @@
                 <a:ea typeface="Microsoft YaHei" pitchFamily="34" charset="-122"/>
                 <a:cs typeface="Microsoft YaHei" pitchFamily="34" charset="-120"/>
               </a:rPr>
-              <a:t>• 实现 ros1_bridge 适配(喂地图 / 回收航点)</a:t>
-            </a:r>
-            <a:endParaRPr lang="en-US" sz="1450" dirty="0"/>
-          </a:p>
-          <a:p>
-            <a:pPr indent="0" marL="0">
-              <a:lnSpc>
-                <a:spcPct val="145000"/>
-              </a:lnSpc>
-              <a:buNone/>
-            </a:pPr>
-            <a:r>
-              <a:rPr lang="en-US" sz="1450" dirty="0">
+              <a:t>物料齐全(integration/world-model-PR/):
+</a:t>
+            </a:r>
+            <a:pPr indent="0" marL="0">
+              <a:lnSpc>
+                <a:spcPct val="125000"/>
+              </a:lnSpc>
+              <a:buNone/>
+            </a:pPr>
+            <a:r>
+              <a:rPr lang="en-US" sz="1250" dirty="0">
                 <a:solidFill>
                   <a:srgbClr val="1F2937"/>
                 </a:solidFill>
@@ -4768,29 +5789,29 @@
                 <a:ea typeface="Microsoft YaHei" pitchFamily="34" charset="-122"/>
                 <a:cs typeface="Microsoft YaHei" pitchFamily="34" charset="-120"/>
               </a:rPr>
-              <a:t>• 把核心演示做成多步连续探索</a:t>
-            </a:r>
-            <a:endParaRPr lang="en-US" sz="1450" dirty="0"/>
-          </a:p>
-          <a:p>
-            <a:pPr indent="0" marL="0">
-              <a:lnSpc>
-                <a:spcPct val="145000"/>
-              </a:lnSpc>
-              <a:buNone/>
-            </a:pPr>
-            <a:r>
-              <a:rPr lang="en-US" sz="1450" dirty="0">
-                <a:solidFill>
-                  <a:srgbClr val="1F2937"/>
-                </a:solidFill>
-                <a:latin typeface="Microsoft YaHei" pitchFamily="34" charset="0"/>
-                <a:ea typeface="Microsoft YaHei" pitchFamily="34" charset="-122"/>
-                <a:cs typeface="Microsoft YaHei" pitchFamily="34" charset="-120"/>
-              </a:rPr>
-              <a:t>• GBPlanner 与 frontier_lite 量化对比</a:t>
-            </a:r>
-            <a:endParaRPr lang="en-US" sz="1450" dirty="0"/>
+              <a:t>• PR/Issue 正文 + 补丁
+• 修复/渲染证据
+• 手动提交分步教程
+</a:t>
+            </a:r>
+            <a:pPr indent="0" marL="0">
+              <a:lnSpc>
+                <a:spcPct val="125000"/>
+              </a:lnSpc>
+              <a:buNone/>
+            </a:pPr>
+            <a:r>
+              <a:rPr lang="en-US" sz="1300" b="1" dirty="0">
+                <a:solidFill>
+                  <a:srgbClr val="B45309"/>
+                </a:solidFill>
+                <a:latin typeface="Microsoft YaHei" pitchFamily="34" charset="0"/>
+                <a:ea typeface="Microsoft YaHei" pitchFamily="34" charset="-122"/>
+                <a:cs typeface="Microsoft YaHei" pitchFamily="34" charset="-120"/>
+              </a:rPr>
+              <a:t>状态:待亲自提交到作者仓库 → 任务闭环</a:t>
+            </a:r>
+            <a:endParaRPr lang="en-US" sz="1300" dirty="0"/>
           </a:p>
         </p:txBody>
       </p:sp>
@@ -4808,7 +5829,7 @@
     <p:bg>
       <p:bgPr>
         <a:solidFill>
-          <a:srgbClr val="1E2761"/>
+          <a:srgbClr val="FFFFFF"/>
         </a:solidFill>
       </p:bgPr>
     </p:bg>
@@ -4834,8 +5855,8 @@
         </p:nvSpPr>
         <p:spPr>
           <a:xfrm>
-            <a:off x="822960" y="2194560"/>
-            <a:ext cx="10607040" cy="1645920"/>
+            <a:off x="548640" y="411480"/>
+            <a:ext cx="11064240" cy="640080"/>
           </a:xfrm>
           <a:prstGeom prst="rect">
             <a:avLst/>
@@ -4848,56 +5869,60 @@
           <a:lstStyle/>
           <a:p>
             <a:pPr indent="0" marL="0">
-              <a:lnSpc>
-                <a:spcPct val="115000"/>
-              </a:lnSpc>
-              <a:buNone/>
-            </a:pPr>
-            <a:r>
-              <a:rPr lang="en-US" sz="3200" b="1" dirty="0">
-                <a:solidFill>
-                  <a:srgbClr val="FFFFFF"/>
-                </a:solidFill>
-                <a:latin typeface="Microsoft YaHei" pitchFamily="34" charset="0"/>
-                <a:ea typeface="Microsoft YaHei" pitchFamily="34" charset="-122"/>
-                <a:cs typeface="Microsoft YaHei" pitchFamily="34" charset="-120"/>
-              </a:rPr>
-              <a:t>frontier_lite 闭眼按脚本动;</a:t>
-            </a:r>
-            <a:endParaRPr lang="en-US" sz="3200" dirty="0"/>
-          </a:p>
-          <a:p>
-            <a:pPr indent="0" marL="0">
-              <a:lnSpc>
-                <a:spcPct val="115000"/>
-              </a:lnSpc>
-              <a:buNone/>
-            </a:pPr>
-            <a:r>
-              <a:rPr lang="en-US" sz="3200" b="1" dirty="0">
-                <a:solidFill>
-                  <a:srgbClr val="FFFFFF"/>
-                </a:solidFill>
-                <a:latin typeface="Microsoft YaHei" pitchFamily="34" charset="0"/>
-                <a:ea typeface="Microsoft YaHei" pitchFamily="34" charset="-122"/>
-                <a:cs typeface="Microsoft YaHei" pitchFamily="34" charset="-120"/>
-              </a:rPr>
-              <a:t>GBPlanner 睁眼挑未知最多的路。</a:t>
-            </a:r>
-            <a:endParaRPr lang="en-US" sz="3200" dirty="0"/>
-          </a:p>
-        </p:txBody>
-      </p:sp>
-      <p:sp>
-        <p:nvSpPr>
-          <p:cNvPr id="3" name="Text 1"/>
-          <p:cNvSpPr/>
-          <p:nvPr/>
-        </p:nvSpPr>
-        <p:spPr>
-          <a:xfrm>
-            <a:off x="868680" y="4114800"/>
-            <a:ext cx="10515600" cy="548640"/>
+              <a:buNone/>
+            </a:pPr>
+            <a:r>
+              <a:rPr lang="en-US" sz="3000" b="1" dirty="0">
+                <a:solidFill>
+                  <a:srgbClr val="1E2761"/>
+                </a:solidFill>
+                <a:latin typeface="Microsoft YaHei" pitchFamily="34" charset="0"/>
+                <a:ea typeface="Microsoft YaHei" pitchFamily="34" charset="-122"/>
+                <a:cs typeface="Microsoft YaHei" pitchFamily="34" charset="-120"/>
+              </a:rPr>
+              <a:t>一次探索:复现仿真平台(及时止损)</a:t>
+            </a:r>
+            <a:endParaRPr lang="en-US" sz="3000" dirty="0"/>
+          </a:p>
+        </p:txBody>
+      </p:sp>
+      <p:sp>
+        <p:nvSpPr>
+          <p:cNvPr id="3" name="Shape 1"/>
+          <p:cNvSpPr/>
+          <p:nvPr/>
+        </p:nvSpPr>
+        <p:spPr>
+          <a:xfrm>
+            <a:off x="548640" y="1645920"/>
+            <a:ext cx="11064240" cy="1554480"/>
+          </a:xfrm>
+          <a:prstGeom prst="roundRect">
+            <a:avLst>
+              <a:gd name="adj" fmla="val 4706"/>
+            </a:avLst>
+          </a:prstGeom>
+          <a:solidFill>
+            <a:srgbClr val="F1F5F9"/>
+          </a:solidFill>
+          <a:ln w="12700">
+            <a:solidFill>
+              <a:srgbClr val="E2E8F0"/>
+            </a:solidFill>
+            <a:prstDash val="solid"/>
+          </a:ln>
+        </p:spPr>
+      </p:sp>
+      <p:sp>
+        <p:nvSpPr>
+          <p:cNvPr id="4" name="Text 2"/>
+          <p:cNvSpPr/>
+          <p:nvPr/>
+        </p:nvSpPr>
+        <p:spPr>
+          <a:xfrm>
+            <a:off x="822960" y="1828800"/>
+            <a:ext cx="10515600" cy="457200"/>
           </a:xfrm>
           <a:prstGeom prst="rect">
             <a:avLst/>
@@ -4913,17 +5938,207 @@
               <a:buNone/>
             </a:pPr>
             <a:r>
-              <a:rPr lang="en-US" sz="1800" dirty="0">
-                <a:solidFill>
-                  <a:srgbClr val="CADCFC"/>
-                </a:solidFill>
-                <a:latin typeface="Microsoft YaHei" pitchFamily="34" charset="0"/>
-                <a:ea typeface="Microsoft YaHei" pitchFamily="34" charset="-122"/>
-                <a:cs typeface="Microsoft YaHei" pitchFamily="34" charset="-120"/>
-              </a:rPr>
-              <a:t>这几天:我们看懂了、把集成设计清楚了、并让核心算法真跑了起来。</a:t>
-            </a:r>
-            <a:endParaRPr lang="en-US" sz="1800" dirty="0"/>
+              <a:rPr lang="en-US" sz="1600" b="1" dirty="0">
+                <a:solidFill>
+                  <a:srgbClr val="1F2937"/>
+                </a:solidFill>
+                <a:latin typeface="Microsoft YaHei" pitchFamily="34" charset="0"/>
+                <a:ea typeface="Microsoft YaHei" pitchFamily="34" charset="-122"/>
+                <a:cs typeface="Microsoft YaHei" pitchFamily="34" charset="-120"/>
+              </a:rPr>
+              <a:t>我们曾尝试在本机完整复现 world-model 的 9 个 Docker 镜像,以端到端运行平台。</a:t>
+            </a:r>
+            <a:endParaRPr lang="en-US" sz="1600" dirty="0"/>
+          </a:p>
+        </p:txBody>
+      </p:sp>
+      <p:sp>
+        <p:nvSpPr>
+          <p:cNvPr id="5" name="Text 3"/>
+          <p:cNvSpPr/>
+          <p:nvPr/>
+        </p:nvSpPr>
+        <p:spPr>
+          <a:xfrm>
+            <a:off x="822960" y="2331720"/>
+            <a:ext cx="10515600" cy="731520"/>
+          </a:xfrm>
+          <a:prstGeom prst="rect">
+            <a:avLst/>
+          </a:prstGeom>
+          <a:noFill/>
+          <a:ln/>
+        </p:spPr>
+        <p:txBody>
+          <a:bodyPr wrap="square" rtlCol="0" anchor="t"/>
+          <a:lstStyle/>
+          <a:p>
+            <a:pPr indent="0" marL="0">
+              <a:lnSpc>
+                <a:spcPct val="120000"/>
+              </a:lnSpc>
+              <a:buNone/>
+            </a:pPr>
+            <a:r>
+              <a:rPr lang="en-US" sz="1450" dirty="0">
+                <a:solidFill>
+                  <a:srgbClr val="1F2937"/>
+                </a:solidFill>
+                <a:latin typeface="Microsoft YaHei" pitchFamily="34" charset="0"/>
+                <a:ea typeface="Microsoft YaHei" pitchFamily="34" charset="-122"/>
+                <a:cs typeface="Microsoft YaHei" pitchFamily="34" charset="-120"/>
+              </a:rPr>
+              <a:t>但该平台为特定 Linux/CI 环境(Ubuntu 24.04)设计,本机从源码构建遭遇一连串版本兼容问题(编译器、Python、Gazebo、Fast-CDR 等)。</a:t>
+            </a:r>
+            <a:endParaRPr lang="en-US" sz="1450" dirty="0"/>
+          </a:p>
+        </p:txBody>
+      </p:sp>
+      <p:sp>
+        <p:nvSpPr>
+          <p:cNvPr id="6" name="Shape 4"/>
+          <p:cNvSpPr/>
+          <p:nvPr/>
+        </p:nvSpPr>
+        <p:spPr>
+          <a:xfrm>
+            <a:off x="548640" y="3383280"/>
+            <a:ext cx="11064240" cy="2651760"/>
+          </a:xfrm>
+          <a:prstGeom prst="roundRect">
+            <a:avLst>
+              <a:gd name="adj" fmla="val 2759"/>
+            </a:avLst>
+          </a:prstGeom>
+          <a:solidFill>
+            <a:srgbClr val="F0FDF4"/>
+          </a:solidFill>
+          <a:ln w="12700">
+            <a:solidFill>
+              <a:srgbClr val="E2E8F0"/>
+            </a:solidFill>
+            <a:prstDash val="solid"/>
+          </a:ln>
+        </p:spPr>
+      </p:sp>
+      <p:sp>
+        <p:nvSpPr>
+          <p:cNvPr id="7" name="Text 5"/>
+          <p:cNvSpPr/>
+          <p:nvPr/>
+        </p:nvSpPr>
+        <p:spPr>
+          <a:xfrm>
+            <a:off x="822960" y="3566160"/>
+            <a:ext cx="10515600" cy="365760"/>
+          </a:xfrm>
+          <a:prstGeom prst="rect">
+            <a:avLst/>
+          </a:prstGeom>
+          <a:noFill/>
+          <a:ln/>
+        </p:spPr>
+        <p:txBody>
+          <a:bodyPr wrap="square" rtlCol="0" anchor="ctr"/>
+          <a:lstStyle/>
+          <a:p>
+            <a:pPr indent="0" marL="0">
+              <a:buNone/>
+            </a:pPr>
+            <a:r>
+              <a:rPr lang="en-US" sz="1600" b="1" dirty="0">
+                <a:solidFill>
+                  <a:srgbClr val="16A34A"/>
+                </a:solidFill>
+                <a:latin typeface="Microsoft YaHei" pitchFamily="34" charset="0"/>
+                <a:ea typeface="Microsoft YaHei" pitchFamily="34" charset="-122"/>
+                <a:cs typeface="Microsoft YaHei" pitchFamily="34" charset="-120"/>
+              </a:rPr>
+              <a:t>关键判断 &amp; 调整</a:t>
+            </a:r>
+            <a:endParaRPr lang="en-US" sz="1600" dirty="0"/>
+          </a:p>
+        </p:txBody>
+      </p:sp>
+      <p:sp>
+        <p:nvSpPr>
+          <p:cNvPr id="8" name="Text 6"/>
+          <p:cNvSpPr/>
+          <p:nvPr/>
+        </p:nvSpPr>
+        <p:spPr>
+          <a:xfrm>
+            <a:off x="822960" y="4023360"/>
+            <a:ext cx="10515600" cy="1828800"/>
+          </a:xfrm>
+          <a:prstGeom prst="rect">
+            <a:avLst/>
+          </a:prstGeom>
+          <a:noFill/>
+          <a:ln/>
+        </p:spPr>
+        <p:txBody>
+          <a:bodyPr wrap="square" rtlCol="0" anchor="t"/>
+          <a:lstStyle/>
+          <a:p>
+            <a:pPr indent="0" marL="0">
+              <a:lnSpc>
+                <a:spcPct val="130000"/>
+              </a:lnSpc>
+              <a:buNone/>
+            </a:pPr>
+            <a:r>
+              <a:rPr lang="en-US" sz="1450" dirty="0">
+                <a:solidFill>
+                  <a:srgbClr val="1F2937"/>
+                </a:solidFill>
+                <a:latin typeface="Microsoft YaHei" pitchFamily="34" charset="0"/>
+                <a:ea typeface="Microsoft YaHei" pitchFamily="34" charset="-122"/>
+                <a:cs typeface="Microsoft YaHei" pitchFamily="34" charset="-120"/>
+              </a:rPr>
+              <a:t>• 复现整个平台并非本任务核心——核心是算法理解 + 集成设计。</a:t>
+            </a:r>
+            <a:endParaRPr lang="en-US" sz="1450" dirty="0"/>
+          </a:p>
+          <a:p>
+            <a:pPr indent="0" marL="0">
+              <a:lnSpc>
+                <a:spcPct val="130000"/>
+              </a:lnSpc>
+              <a:buNone/>
+            </a:pPr>
+            <a:r>
+              <a:rPr lang="en-US" sz="1450" dirty="0">
+                <a:solidFill>
+                  <a:srgbClr val="1F2937"/>
+                </a:solidFill>
+                <a:latin typeface="Microsoft YaHei" pitchFamily="34" charset="0"/>
+                <a:ea typeface="Microsoft YaHei" pitchFamily="34" charset="-122"/>
+                <a:cs typeface="Microsoft YaHei" pitchFamily="34" charset="-120"/>
+              </a:rPr>
+              <a:t>• 据此及时调整方向:聚焦算法本身,靠读源码论证缺陷、设计集成、让核心算法真跑起来。</a:t>
+            </a:r>
+            <a:endParaRPr lang="en-US" sz="1450" dirty="0"/>
+          </a:p>
+          <a:p>
+            <a:pPr indent="0" marL="0">
+              <a:lnSpc>
+                <a:spcPct val="130000"/>
+              </a:lnSpc>
+              <a:buNone/>
+            </a:pPr>
+            <a:r>
+              <a:rPr lang="en-US" sz="1450" dirty="0">
+                <a:solidFill>
+                  <a:srgbClr val="1F2937"/>
+                </a:solidFill>
+                <a:latin typeface="Microsoft YaHei" pitchFamily="34" charset="0"/>
+                <a:ea typeface="Microsoft YaHei" pitchFamily="34" charset="-122"/>
+                <a:cs typeface="Microsoft YaHei" pitchFamily="34" charset="-120"/>
+              </a:rPr>
+              <a:t>• 教训:别为复现别人的基础设施过度投入;换 MacBook 也不解决(同样用 Docker/Linux,Apple 芯片反而更难)。</a:t>
+            </a:r>
+            <a:endParaRPr lang="en-US" sz="1450" dirty="0"/>
           </a:p>
         </p:txBody>
       </p:sp>

--- a/GBPlanner项目进展汇报.pptx
+++ b/GBPlanner项目进展汇报.pptx
@@ -16,9 +16,10 @@
     <p:sldId id="264" r:id="rId10"/>
     <p:sldId id="265" r:id="rId11"/>
     <p:sldId id="266" r:id="rId12"/>
+    <p:sldId id="267" r:id="rId13"/>
   </p:sldIdLst>
   <p:notesMasterIdLst>
-    <p:notesMasterId r:id="rId13"/>
+    <p:notesMasterId r:id="rId14"/>
   </p:notesMasterIdLst>
   <p:sldSz cx="12188952" cy="6858000"/>
   <p:notesSz cx="6858000" cy="12188952"/>
@@ -712,6 +713,94 @@
             <a:fld id="{F7021451-1387-4CA6-816F-3879F97B5CBC}" type="slidenum">
               <a:rPr lang="en-US"/>
               <a:t>11</a:t>
+            </a:fld>
+            <a:endParaRPr lang="en-US"/>
+          </a:p>
+        </p:txBody>
+      </p:sp>
+    </p:spTree>
+    <p:extLst>
+      <p:ext uri="{BB962C8B-B14F-4D97-AF65-F5344CB8AC3E}">
+        <p14:creationId xmlns:p14="http://schemas.microsoft.com/office/powerpoint/2010/main" val="1024086991"/>
+      </p:ext>
+    </p:extLst>
+  </p:cSld>
+  <p:clrMapOvr>
+    <a:masterClrMapping/>
+  </p:clrMapOvr>
+</p:notes>
+</file>
+
+<file path=ppt/notesSlides/notesSlide12.xml><?xml version="1.0" encoding="utf-8"?>
+<p:notes xmlns:a="http://schemas.openxmlformats.org/drawingml/2006/main" xmlns:r="http://schemas.openxmlformats.org/officeDocument/2006/relationships" xmlns:p="http://schemas.openxmlformats.org/presentationml/2006/main">
+  <p:cSld>
+    <p:spTree>
+      <p:nvGrpSpPr>
+        <p:cNvPr id="1" name=""/>
+        <p:cNvGrpSpPr/>
+        <p:nvPr/>
+      </p:nvGrpSpPr>
+      <p:grpSpPr>
+        <a:xfrm>
+          <a:off x="0" y="0"/>
+          <a:ext cx="0" cy="0"/>
+          <a:chOff x="0" y="0"/>
+          <a:chExt cx="0" cy="0"/>
+        </a:xfrm>
+      </p:grpSpPr>
+      <p:sp>
+        <p:nvSpPr>
+          <p:cNvPr id="2" name="Slide Image Placeholder 1"/>
+          <p:cNvSpPr>
+            <a:spLocks noGrp="1" noRot="1" noChangeAspect="1"/>
+          </p:cNvSpPr>
+          <p:nvPr>
+            <p:ph type="sldImg"/>
+          </p:nvPr>
+        </p:nvSpPr>
+        <p:spPr/>
+      </p:sp>
+      <p:sp>
+        <p:nvSpPr>
+          <p:cNvPr id="3" name="Notes Placeholder 2"/>
+          <p:cNvSpPr>
+            <a:spLocks noGrp="1"/>
+          </p:cNvSpPr>
+          <p:nvPr>
+            <p:ph type="body" idx="1"/>
+          </p:nvPr>
+        </p:nvSpPr>
+        <p:spPr/>
+        <p:txBody>
+          <a:bodyPr/>
+          <a:lstStyle/>
+          <a:p>
+            <a:r>
+              <a:rPr lang="en-US" dirty="0"/>
+              <a:t/>
+            </a:r>
+            <a:endParaRPr lang="en-US" dirty="0"/>
+          </a:p>
+        </p:txBody>
+      </p:sp>
+      <p:sp>
+        <p:nvSpPr>
+          <p:cNvPr id="4" name="Slide Number Placeholder 3"/>
+          <p:cNvSpPr>
+            <a:spLocks noGrp="1"/>
+          </p:cNvSpPr>
+          <p:nvPr>
+            <p:ph type="sldNum" sz="quarter" idx="10"/>
+          </p:nvPr>
+        </p:nvSpPr>
+        <p:spPr/>
+        <p:txBody>
+          <a:bodyPr/>
+          <a:lstStyle/>
+          <a:p>
+            <a:fld id="{F7021451-1387-4CA6-816F-3879F97B5CBC}" type="slidenum">
+              <a:rPr lang="en-US"/>
+              <a:t>12</a:t>
             </a:fld>
             <a:endParaRPr lang="en-US"/>
           </a:p>
@@ -2009,7 +2098,7 @@
                 <a:ea typeface="Microsoft YaHei" pitchFamily="34" charset="-122"/>
                 <a:cs typeface="Microsoft YaHei" pitchFamily="34" charset="-120"/>
               </a:rPr>
-              <a:t>当前状态与下一步</a:t>
+              <a:t>一次探索:复现仿真平台(及时止损)</a:t>
             </a:r>
             <a:endParaRPr lang="en-US" sz="3000" dirty="0"/>
           </a:p>
@@ -2024,11 +2113,119 @@
         <p:spPr>
           <a:xfrm>
             <a:off x="548640" y="1645920"/>
-            <a:ext cx="5486400" cy="4389120"/>
+            <a:ext cx="11064240" cy="1554480"/>
           </a:xfrm>
           <a:prstGeom prst="roundRect">
             <a:avLst>
-              <a:gd name="adj" fmla="val 1667"/>
+              <a:gd name="adj" fmla="val 4706"/>
+            </a:avLst>
+          </a:prstGeom>
+          <a:solidFill>
+            <a:srgbClr val="F1F5F9"/>
+          </a:solidFill>
+          <a:ln w="12700">
+            <a:solidFill>
+              <a:srgbClr val="E2E8F0"/>
+            </a:solidFill>
+            <a:prstDash val="solid"/>
+          </a:ln>
+        </p:spPr>
+      </p:sp>
+      <p:sp>
+        <p:nvSpPr>
+          <p:cNvPr id="4" name="Text 2"/>
+          <p:cNvSpPr/>
+          <p:nvPr/>
+        </p:nvSpPr>
+        <p:spPr>
+          <a:xfrm>
+            <a:off x="822960" y="1828800"/>
+            <a:ext cx="10515600" cy="457200"/>
+          </a:xfrm>
+          <a:prstGeom prst="rect">
+            <a:avLst/>
+          </a:prstGeom>
+          <a:noFill/>
+          <a:ln/>
+        </p:spPr>
+        <p:txBody>
+          <a:bodyPr wrap="square" rtlCol="0" anchor="ctr"/>
+          <a:lstStyle/>
+          <a:p>
+            <a:pPr indent="0" marL="0">
+              <a:buNone/>
+            </a:pPr>
+            <a:r>
+              <a:rPr lang="en-US" sz="1600" b="1" dirty="0">
+                <a:solidFill>
+                  <a:srgbClr val="1F2937"/>
+                </a:solidFill>
+                <a:latin typeface="Microsoft YaHei" pitchFamily="34" charset="0"/>
+                <a:ea typeface="Microsoft YaHei" pitchFamily="34" charset="-122"/>
+                <a:cs typeface="Microsoft YaHei" pitchFamily="34" charset="-120"/>
+              </a:rPr>
+              <a:t>我们曾尝试在本机完整复现 world-model 的 9 个 Docker 镜像,以端到端运行平台。</a:t>
+            </a:r>
+            <a:endParaRPr lang="en-US" sz="1600" dirty="0"/>
+          </a:p>
+        </p:txBody>
+      </p:sp>
+      <p:sp>
+        <p:nvSpPr>
+          <p:cNvPr id="5" name="Text 3"/>
+          <p:cNvSpPr/>
+          <p:nvPr/>
+        </p:nvSpPr>
+        <p:spPr>
+          <a:xfrm>
+            <a:off x="822960" y="2331720"/>
+            <a:ext cx="10515600" cy="731520"/>
+          </a:xfrm>
+          <a:prstGeom prst="rect">
+            <a:avLst/>
+          </a:prstGeom>
+          <a:noFill/>
+          <a:ln/>
+        </p:spPr>
+        <p:txBody>
+          <a:bodyPr wrap="square" rtlCol="0" anchor="t"/>
+          <a:lstStyle/>
+          <a:p>
+            <a:pPr indent="0" marL="0">
+              <a:lnSpc>
+                <a:spcPct val="120000"/>
+              </a:lnSpc>
+              <a:buNone/>
+            </a:pPr>
+            <a:r>
+              <a:rPr lang="en-US" sz="1450" dirty="0">
+                <a:solidFill>
+                  <a:srgbClr val="1F2937"/>
+                </a:solidFill>
+                <a:latin typeface="Microsoft YaHei" pitchFamily="34" charset="0"/>
+                <a:ea typeface="Microsoft YaHei" pitchFamily="34" charset="-122"/>
+                <a:cs typeface="Microsoft YaHei" pitchFamily="34" charset="-120"/>
+              </a:rPr>
+              <a:t>但该平台为特定 Linux/CI 环境(Ubuntu 24.04)设计,本机从源码构建遭遇一连串版本兼容问题(编译器、Python、Gazebo、Fast-CDR 等)。</a:t>
+            </a:r>
+            <a:endParaRPr lang="en-US" sz="1450" dirty="0"/>
+          </a:p>
+        </p:txBody>
+      </p:sp>
+      <p:sp>
+        <p:nvSpPr>
+          <p:cNvPr id="6" name="Shape 4"/>
+          <p:cNvSpPr/>
+          <p:nvPr/>
+        </p:nvSpPr>
+        <p:spPr>
+          <a:xfrm>
+            <a:off x="548640" y="3383280"/>
+            <a:ext cx="11064240" cy="2651760"/>
+          </a:xfrm>
+          <a:prstGeom prst="roundRect">
+            <a:avLst>
+              <a:gd name="adj" fmla="val 2759"/>
             </a:avLst>
           </a:prstGeom>
           <a:solidFill>
@@ -2044,14 +2241,14 @@
       </p:sp>
       <p:sp>
         <p:nvSpPr>
-          <p:cNvPr id="4" name="Text 2"/>
-          <p:cNvSpPr/>
-          <p:nvPr/>
-        </p:nvSpPr>
-        <p:spPr>
-          <a:xfrm>
-            <a:off x="777240" y="1828800"/>
-            <a:ext cx="5029200" cy="365760"/>
+          <p:cNvPr id="7" name="Text 5"/>
+          <p:cNvSpPr/>
+          <p:nvPr/>
+        </p:nvSpPr>
+        <p:spPr>
+          <a:xfrm>
+            <a:off x="822960" y="3566160"/>
+            <a:ext cx="10515600" cy="365760"/>
           </a:xfrm>
           <a:prstGeom prst="rect">
             <a:avLst/>
@@ -2067,7 +2264,7 @@
               <a:buNone/>
             </a:pPr>
             <a:r>
-              <a:rPr lang="en-US" sz="1700" b="1" dirty="0">
+              <a:rPr lang="en-US" sz="1600" b="1" dirty="0">
                 <a:solidFill>
                   <a:srgbClr val="16A34A"/>
                 </a:solidFill>
@@ -2075,22 +2272,22 @@
                 <a:ea typeface="Microsoft YaHei" pitchFamily="34" charset="-122"/>
                 <a:cs typeface="Microsoft YaHei" pitchFamily="34" charset="-120"/>
               </a:rPr>
-              <a:t>✓ 已完成(扎实)</a:t>
-            </a:r>
-            <a:endParaRPr lang="en-US" sz="1700" dirty="0"/>
-          </a:p>
-        </p:txBody>
-      </p:sp>
-      <p:sp>
-        <p:nvSpPr>
-          <p:cNvPr id="5" name="Text 3"/>
-          <p:cNvSpPr/>
-          <p:nvPr/>
-        </p:nvSpPr>
-        <p:spPr>
-          <a:xfrm>
-            <a:off x="777240" y="2286000"/>
-            <a:ext cx="5029200" cy="3566160"/>
+              <a:t>关键判断 &amp; 调整</a:t>
+            </a:r>
+            <a:endParaRPr lang="en-US" sz="1600" dirty="0"/>
+          </a:p>
+        </p:txBody>
+      </p:sp>
+      <p:sp>
+        <p:nvSpPr>
+          <p:cNvPr id="8" name="Text 6"/>
+          <p:cNvSpPr/>
+          <p:nvPr/>
+        </p:nvSpPr>
+        <p:spPr>
+          <a:xfrm>
+            <a:off x="822960" y="4023360"/>
+            <a:ext cx="10515600" cy="1828800"/>
           </a:xfrm>
           <a:prstGeom prst="rect">
             <a:avLst/>
@@ -2109,7 +2306,7 @@
               <a:buNone/>
             </a:pPr>
             <a:r>
-              <a:rPr lang="en-US" sz="1300" dirty="0">
+              <a:rPr lang="en-US" sz="1450" dirty="0">
                 <a:solidFill>
                   <a:srgbClr val="1F2937"/>
                 </a:solidFill>
@@ -2117,9 +2314,9 @@
                 <a:ea typeface="Microsoft YaHei" pitchFamily="34" charset="-122"/>
                 <a:cs typeface="Microsoft YaHei" pitchFamily="34" charset="-120"/>
               </a:rPr>
-              <a:t>• 摸清两个系统 + 三道鸿沟,定下桥接方案</a:t>
-            </a:r>
-            <a:endParaRPr lang="en-US" sz="1300" dirty="0"/>
+              <a:t>• 复现整个平台并非本任务核心——核心是算法理解 + 集成设计。</a:t>
+            </a:r>
+            <a:endParaRPr lang="en-US" sz="1450" dirty="0"/>
           </a:p>
           <a:p>
             <a:pPr indent="0" marL="0">
@@ -2129,7 +2326,7 @@
               <a:buNone/>
             </a:pPr>
             <a:r>
-              <a:rPr lang="en-US" sz="1300" dirty="0">
+              <a:rPr lang="en-US" sz="1450" dirty="0">
                 <a:solidFill>
                   <a:srgbClr val="1F2937"/>
                 </a:solidFill>
@@ -2137,9 +2334,9 @@
                 <a:ea typeface="Microsoft YaHei" pitchFamily="34" charset="-122"/>
                 <a:cs typeface="Microsoft YaHei" pitchFamily="34" charset="-120"/>
               </a:rPr>
-              <a:t>• 算法核心可运行:体积增益决策演示 + 单测</a:t>
-            </a:r>
-            <a:endParaRPr lang="en-US" sz="1300" dirty="0"/>
+              <a:t>• 据此及时调整方向:聚焦算法本身,靠读源码论证缺陷、设计集成、让核心算法真跑起来。</a:t>
+            </a:r>
+            <a:endParaRPr lang="en-US" sz="1450" dirty="0"/>
           </a:p>
           <a:p>
             <a:pPr indent="0" marL="0">
@@ -2149,7 +2346,7 @@
               <a:buNone/>
             </a:pPr>
             <a:r>
-              <a:rPr lang="en-US" sz="1300" dirty="0">
+              <a:rPr lang="en-US" sz="1450" dirty="0">
                 <a:solidFill>
                   <a:srgbClr val="1F2937"/>
                 </a:solidFill>
@@ -2157,257 +2354,9 @@
                 <a:ea typeface="Microsoft YaHei" pitchFamily="34" charset="-122"/>
                 <a:cs typeface="Microsoft YaHei" pitchFamily="34" charset="-120"/>
               </a:rPr>
-              <a:t>• gbplanner_gain 决策层原型接进 world-model 结构</a:t>
-            </a:r>
-            <a:endParaRPr lang="en-US" sz="1300" dirty="0"/>
-          </a:p>
-          <a:p>
-            <a:pPr indent="0" marL="0">
-              <a:lnSpc>
-                <a:spcPct val="130000"/>
-              </a:lnSpc>
-              <a:buNone/>
-            </a:pPr>
-            <a:r>
-              <a:rPr lang="en-US" sz="1300" dirty="0">
-                <a:solidFill>
-                  <a:srgbClr val="1F2937"/>
-                </a:solidFill>
-                <a:latin typeface="Microsoft YaHei" pitchFamily="34" charset="0"/>
-                <a:ea typeface="Microsoft YaHei" pitchFamily="34" charset="-122"/>
-                <a:cs typeface="Microsoft YaHei" pitchFamily="34" charset="-120"/>
-              </a:rPr>
-              <a:t>• 阶段4 桥接地基:源码证实真版 I/O 契约 + ROS2 适配器</a:t>
-            </a:r>
-            <a:endParaRPr lang="en-US" sz="1300" dirty="0"/>
-          </a:p>
-          <a:p>
-            <a:pPr indent="0" marL="0">
-              <a:lnSpc>
-                <a:spcPct val="130000"/>
-              </a:lnSpc>
-              <a:buNone/>
-            </a:pPr>
-            <a:r>
-              <a:rPr lang="en-US" sz="1300" dirty="0">
-                <a:solidFill>
-                  <a:srgbClr val="1F2937"/>
-                </a:solidFill>
-                <a:latin typeface="Microsoft YaHei" pitchFamily="34" charset="0"/>
-                <a:ea typeface="Microsoft YaHei" pitchFamily="34" charset="-122"/>
-                <a:cs typeface="Microsoft YaHei" pitchFamily="34" charset="-120"/>
-              </a:rPr>
-              <a:t>• 连修 3 个 humble 真 bug,SLAM 从一崩→cartographer 真运行</a:t>
-            </a:r>
-            <a:endParaRPr lang="en-US" sz="1300" dirty="0"/>
-          </a:p>
-          <a:p>
-            <a:pPr indent="0" marL="0">
-              <a:lnSpc>
-                <a:spcPct val="130000"/>
-              </a:lnSpc>
-              <a:buNone/>
-            </a:pPr>
-            <a:r>
-              <a:rPr lang="en-US" sz="1300" dirty="0">
-                <a:solidFill>
-                  <a:srgbClr val="1F2937"/>
-                </a:solidFill>
-                <a:latin typeface="Microsoft YaHei" pitchFamily="34" charset="0"/>
-                <a:ea typeface="Microsoft YaHei" pitchFamily="34" charset="-122"/>
-                <a:cs typeface="Microsoft YaHei" pitchFamily="34" charset="-120"/>
-              </a:rPr>
-              <a:t>• 9/9 镜像构建成功;缺陷有代码铁证</a:t>
-            </a:r>
-            <a:endParaRPr lang="en-US" sz="1300" dirty="0"/>
-          </a:p>
-          <a:p>
-            <a:pPr indent="0" marL="0">
-              <a:lnSpc>
-                <a:spcPct val="130000"/>
-              </a:lnSpc>
-              <a:buNone/>
-            </a:pPr>
-            <a:r>
-              <a:rPr lang="en-US" sz="1300" dirty="0">
-                <a:solidFill>
-                  <a:srgbClr val="1F2937"/>
-                </a:solidFill>
-                <a:latin typeface="Microsoft YaHei" pitchFamily="34" charset="0"/>
-                <a:ea typeface="Microsoft YaHei" pitchFamily="34" charset="-122"/>
-                <a:cs typeface="Microsoft YaHei" pitchFamily="34" charset="-120"/>
-              </a:rPr>
-              <a:t>• PR/Issue 物料备好 + 完整文档 + GitHub 私有仓</a:t>
-            </a:r>
-            <a:endParaRPr lang="en-US" sz="1300" dirty="0"/>
-          </a:p>
-        </p:txBody>
-      </p:sp>
-      <p:sp>
-        <p:nvSpPr>
-          <p:cNvPr id="6" name="Shape 4"/>
-          <p:cNvSpPr/>
-          <p:nvPr/>
-        </p:nvSpPr>
-        <p:spPr>
-          <a:xfrm>
-            <a:off x="6309360" y="1645920"/>
-            <a:ext cx="5303520" cy="4389120"/>
-          </a:xfrm>
-          <a:prstGeom prst="roundRect">
-            <a:avLst>
-              <a:gd name="adj" fmla="val 1667"/>
-            </a:avLst>
-          </a:prstGeom>
-          <a:solidFill>
-            <a:srgbClr val="EFF6FF"/>
-          </a:solidFill>
-          <a:ln w="12700">
-            <a:solidFill>
-              <a:srgbClr val="E2E8F0"/>
-            </a:solidFill>
-            <a:prstDash val="solid"/>
-          </a:ln>
-        </p:spPr>
-      </p:sp>
-      <p:sp>
-        <p:nvSpPr>
-          <p:cNvPr id="7" name="Text 5"/>
-          <p:cNvSpPr/>
-          <p:nvPr/>
-        </p:nvSpPr>
-        <p:spPr>
-          <a:xfrm>
-            <a:off x="6537960" y="1828800"/>
-            <a:ext cx="4846320" cy="365760"/>
-          </a:xfrm>
-          <a:prstGeom prst="rect">
-            <a:avLst/>
-          </a:prstGeom>
-          <a:noFill/>
-          <a:ln/>
-        </p:spPr>
-        <p:txBody>
-          <a:bodyPr wrap="square" rtlCol="0" anchor="ctr"/>
-          <a:lstStyle/>
-          <a:p>
-            <a:pPr indent="0" marL="0">
-              <a:buNone/>
-            </a:pPr>
-            <a:r>
-              <a:rPr lang="en-US" sz="1700" b="1" dirty="0">
-                <a:solidFill>
-                  <a:srgbClr val="1E2761"/>
-                </a:solidFill>
-                <a:latin typeface="Microsoft YaHei" pitchFamily="34" charset="0"/>
-                <a:ea typeface="Microsoft YaHei" pitchFamily="34" charset="-122"/>
-                <a:cs typeface="Microsoft YaHei" pitchFamily="34" charset="-120"/>
-              </a:rPr>
-              <a:t>→ 进行中 / 下一步</a:t>
-            </a:r>
-            <a:endParaRPr lang="en-US" sz="1700" dirty="0"/>
-          </a:p>
-        </p:txBody>
-      </p:sp>
-      <p:sp>
-        <p:nvSpPr>
-          <p:cNvPr id="8" name="Text 6"/>
-          <p:cNvSpPr/>
-          <p:nvPr/>
-        </p:nvSpPr>
-        <p:spPr>
-          <a:xfrm>
-            <a:off x="6537960" y="2286000"/>
-            <a:ext cx="4846320" cy="3566160"/>
-          </a:xfrm>
-          <a:prstGeom prst="rect">
-            <a:avLst/>
-          </a:prstGeom>
-          <a:noFill/>
-          <a:ln/>
-        </p:spPr>
-        <p:txBody>
-          <a:bodyPr wrap="square" rtlCol="0" anchor="t"/>
-          <a:lstStyle/>
-          <a:p>
-            <a:pPr indent="0" marL="0">
-              <a:lnSpc>
-                <a:spcPct val="135000"/>
-              </a:lnSpc>
-              <a:buNone/>
-            </a:pPr>
-            <a:r>
-              <a:rPr lang="en-US" sz="1300" dirty="0">
-                <a:solidFill>
-                  <a:srgbClr val="1F2937"/>
-                </a:solidFill>
-                <a:latin typeface="Microsoft YaHei" pitchFamily="34" charset="0"/>
-                <a:ea typeface="Microsoft YaHei" pitchFamily="34" charset="-122"/>
-                <a:cs typeface="Microsoft YaHei" pitchFamily="34" charset="-120"/>
-              </a:rPr>
-              <a:t>• 接着剥运行时坑:让 /scan 到达 cartographer → SLAM healthy</a:t>
-            </a:r>
-            <a:endParaRPr lang="en-US" sz="1300" dirty="0"/>
-          </a:p>
-          <a:p>
-            <a:pPr indent="0" marL="0">
-              <a:lnSpc>
-                <a:spcPct val="135000"/>
-              </a:lnSpc>
-              <a:buNone/>
-            </a:pPr>
-            <a:r>
-              <a:rPr lang="en-US" sz="1300" dirty="0">
-                <a:solidFill>
-                  <a:srgbClr val="1F2937"/>
-                </a:solidFill>
-                <a:latin typeface="Microsoft YaHei" pitchFamily="34" charset="0"/>
-                <a:ea typeface="Microsoft YaHei" pitchFamily="34" charset="-122"/>
-                <a:cs typeface="Microsoft YaHei" pitchFamily="34" charset="-120"/>
-              </a:rPr>
-              <a:t>• 跑通 exploration,取 frontier_lite 真实指标 + 验证 gbplanner_gain</a:t>
-            </a:r>
-            <a:endParaRPr lang="en-US" sz="1300" dirty="0"/>
-          </a:p>
-          <a:p>
-            <a:pPr indent="0" marL="0">
-              <a:lnSpc>
-                <a:spcPct val="135000"/>
-              </a:lnSpc>
-              <a:buNone/>
-            </a:pPr>
-            <a:r>
-              <a:rPr lang="en-US" sz="1300" dirty="0">
-                <a:solidFill>
-                  <a:srgbClr val="1F2937"/>
-                </a:solidFill>
-                <a:latin typeface="Microsoft YaHei" pitchFamily="34" charset="0"/>
-                <a:ea typeface="Microsoft YaHei" pitchFamily="34" charset="-122"/>
-                <a:cs typeface="Microsoft YaHei" pitchFamily="34" charset="-120"/>
-              </a:rPr>
-              <a:t>• 完整路线:加 3D 雷达 + 起 ros1_bridge 接真版 GBPlanner</a:t>
-            </a:r>
-            <a:endParaRPr lang="en-US" sz="1300" dirty="0"/>
-          </a:p>
-          <a:p>
-            <a:pPr indent="0" marL="0">
-              <a:lnSpc>
-                <a:spcPct val="135000"/>
-              </a:lnSpc>
-              <a:buNone/>
-            </a:pPr>
-            <a:r>
-              <a:rPr lang="en-US" sz="1300" dirty="0">
-                <a:solidFill>
-                  <a:srgbClr val="1F2937"/>
-                </a:solidFill>
-                <a:latin typeface="Microsoft YaHei" pitchFamily="34" charset="0"/>
-                <a:ea typeface="Microsoft YaHei" pitchFamily="34" charset="-122"/>
-                <a:cs typeface="Microsoft YaHei" pitchFamily="34" charset="-120"/>
-              </a:rPr>
-              <a:t>• 同场景量化对比;把 PR + Issue 提交给作者(任务闭环)</a:t>
-            </a:r>
-            <a:endParaRPr lang="en-US" sz="1300" dirty="0"/>
+              <a:t>• 教训:别为复现别人的基础设施过度投入;换 MacBook 也不解决(同样用 Docker/Linux,Apple 芯片反而更难)。</a:t>
+            </a:r>
+            <a:endParaRPr lang="en-US" sz="1450" dirty="0"/>
           </a:p>
         </p:txBody>
       </p:sp>
@@ -2422,6 +2371,493 @@
 <file path=ppt/slides/slide11.xml><?xml version="1.0" encoding="utf-8"?>
 <p:sld xmlns:a="http://schemas.openxmlformats.org/drawingml/2006/main" xmlns:r="http://schemas.openxmlformats.org/officeDocument/2006/relationships" xmlns:p="http://schemas.openxmlformats.org/presentationml/2006/main">
   <p:cSld name="Slide 11">
+    <p:bg>
+      <p:bgPr>
+        <a:solidFill>
+          <a:srgbClr val="FFFFFF"/>
+        </a:solidFill>
+      </p:bgPr>
+    </p:bg>
+    <p:spTree>
+      <p:nvGrpSpPr>
+        <p:cNvPr id="1" name=""/>
+        <p:cNvGrpSpPr/>
+        <p:nvPr/>
+      </p:nvGrpSpPr>
+      <p:grpSpPr>
+        <a:xfrm>
+          <a:off x="0" y="0"/>
+          <a:ext cx="0" cy="0"/>
+          <a:chOff x="0" y="0"/>
+          <a:chExt cx="0" cy="0"/>
+        </a:xfrm>
+      </p:grpSpPr>
+      <p:sp>
+        <p:nvSpPr>
+          <p:cNvPr id="2" name="Text 0"/>
+          <p:cNvSpPr/>
+          <p:nvPr/>
+        </p:nvSpPr>
+        <p:spPr>
+          <a:xfrm>
+            <a:off x="548640" y="411480"/>
+            <a:ext cx="11064240" cy="640080"/>
+          </a:xfrm>
+          <a:prstGeom prst="rect">
+            <a:avLst/>
+          </a:prstGeom>
+          <a:noFill/>
+          <a:ln/>
+        </p:spPr>
+        <p:txBody>
+          <a:bodyPr wrap="square" rtlCol="0" anchor="ctr"/>
+          <a:lstStyle/>
+          <a:p>
+            <a:pPr indent="0" marL="0">
+              <a:buNone/>
+            </a:pPr>
+            <a:r>
+              <a:rPr lang="en-US" sz="3000" b="1" dirty="0">
+                <a:solidFill>
+                  <a:srgbClr val="1E2761"/>
+                </a:solidFill>
+                <a:latin typeface="Microsoft YaHei" pitchFamily="34" charset="0"/>
+                <a:ea typeface="Microsoft YaHei" pitchFamily="34" charset="-122"/>
+                <a:cs typeface="Microsoft YaHei" pitchFamily="34" charset="-120"/>
+              </a:rPr>
+              <a:t>当前状态与下一步</a:t>
+            </a:r>
+            <a:endParaRPr lang="en-US" sz="3000" dirty="0"/>
+          </a:p>
+        </p:txBody>
+      </p:sp>
+      <p:sp>
+        <p:nvSpPr>
+          <p:cNvPr id="3" name="Shape 1"/>
+          <p:cNvSpPr/>
+          <p:nvPr/>
+        </p:nvSpPr>
+        <p:spPr>
+          <a:xfrm>
+            <a:off x="548640" y="1645920"/>
+            <a:ext cx="5486400" cy="4389120"/>
+          </a:xfrm>
+          <a:prstGeom prst="roundRect">
+            <a:avLst>
+              <a:gd name="adj" fmla="val 1667"/>
+            </a:avLst>
+          </a:prstGeom>
+          <a:solidFill>
+            <a:srgbClr val="F0FDF4"/>
+          </a:solidFill>
+          <a:ln w="12700">
+            <a:solidFill>
+              <a:srgbClr val="E2E8F0"/>
+            </a:solidFill>
+            <a:prstDash val="solid"/>
+          </a:ln>
+        </p:spPr>
+      </p:sp>
+      <p:sp>
+        <p:nvSpPr>
+          <p:cNvPr id="4" name="Text 2"/>
+          <p:cNvSpPr/>
+          <p:nvPr/>
+        </p:nvSpPr>
+        <p:spPr>
+          <a:xfrm>
+            <a:off x="777240" y="1828800"/>
+            <a:ext cx="5029200" cy="365760"/>
+          </a:xfrm>
+          <a:prstGeom prst="rect">
+            <a:avLst/>
+          </a:prstGeom>
+          <a:noFill/>
+          <a:ln/>
+        </p:spPr>
+        <p:txBody>
+          <a:bodyPr wrap="square" rtlCol="0" anchor="ctr"/>
+          <a:lstStyle/>
+          <a:p>
+            <a:pPr indent="0" marL="0">
+              <a:buNone/>
+            </a:pPr>
+            <a:r>
+              <a:rPr lang="en-US" sz="1700" b="1" dirty="0">
+                <a:solidFill>
+                  <a:srgbClr val="16A34A"/>
+                </a:solidFill>
+                <a:latin typeface="Microsoft YaHei" pitchFamily="34" charset="0"/>
+                <a:ea typeface="Microsoft YaHei" pitchFamily="34" charset="-122"/>
+                <a:cs typeface="Microsoft YaHei" pitchFamily="34" charset="-120"/>
+              </a:rPr>
+              <a:t>✓ 已完成(扎实)</a:t>
+            </a:r>
+            <a:endParaRPr lang="en-US" sz="1700" dirty="0"/>
+          </a:p>
+        </p:txBody>
+      </p:sp>
+      <p:sp>
+        <p:nvSpPr>
+          <p:cNvPr id="5" name="Text 3"/>
+          <p:cNvSpPr/>
+          <p:nvPr/>
+        </p:nvSpPr>
+        <p:spPr>
+          <a:xfrm>
+            <a:off x="777240" y="2286000"/>
+            <a:ext cx="5029200" cy="3566160"/>
+          </a:xfrm>
+          <a:prstGeom prst="rect">
+            <a:avLst/>
+          </a:prstGeom>
+          <a:noFill/>
+          <a:ln/>
+        </p:spPr>
+        <p:txBody>
+          <a:bodyPr wrap="square" rtlCol="0" anchor="t"/>
+          <a:lstStyle/>
+          <a:p>
+            <a:pPr indent="0" marL="0">
+              <a:lnSpc>
+                <a:spcPct val="125000"/>
+              </a:lnSpc>
+              <a:buNone/>
+            </a:pPr>
+            <a:r>
+              <a:rPr lang="en-US" sz="1250" dirty="0">
+                <a:solidFill>
+                  <a:srgbClr val="1F2937"/>
+                </a:solidFill>
+                <a:latin typeface="Microsoft YaHei" pitchFamily="34" charset="0"/>
+                <a:ea typeface="Microsoft YaHei" pitchFamily="34" charset="-122"/>
+                <a:cs typeface="Microsoft YaHei" pitchFamily="34" charset="-120"/>
+              </a:rPr>
+              <a:t>• ⭐ 官方 GBPlanner 仿真全闭环实测+量化</a:t>
+            </a:r>
+            <a:endParaRPr lang="en-US" sz="1250" dirty="0"/>
+          </a:p>
+          <a:p>
+            <a:pPr indent="0" marL="0">
+              <a:lnSpc>
+                <a:spcPct val="125000"/>
+              </a:lnSpc>
+              <a:buNone/>
+            </a:pPr>
+            <a:r>
+              <a:rPr lang="en-US" sz="1250" dirty="0">
+                <a:solidFill>
+                  <a:srgbClr val="1F2937"/>
+                </a:solidFill>
+                <a:latin typeface="Microsoft YaHei" pitchFamily="34" charset="0"/>
+                <a:ea typeface="Microsoft YaHei" pitchFamily="34" charset="-122"/>
+                <a:cs typeface="Microsoft YaHei" pitchFamily="34" charset="-120"/>
+              </a:rPr>
+              <a:t>  (291m 路径 / 13 万体素地图 / 自动返航 / 地图落盘)</a:t>
+            </a:r>
+            <a:endParaRPr lang="en-US" sz="1250" dirty="0"/>
+          </a:p>
+          <a:p>
+            <a:pPr indent="0" marL="0">
+              <a:lnSpc>
+                <a:spcPct val="125000"/>
+              </a:lnSpc>
+              <a:buNone/>
+            </a:pPr>
+            <a:r>
+              <a:rPr lang="en-US" sz="1250" dirty="0">
+                <a:solidFill>
+                  <a:srgbClr val="1F2937"/>
+                </a:solidFill>
+                <a:latin typeface="Microsoft YaHei" pitchFamily="34" charset="0"/>
+                <a:ea typeface="Microsoft YaHei" pitchFamily="34" charset="-122"/>
+                <a:cs typeface="Microsoft YaHei" pitchFamily="34" charset="-120"/>
+              </a:rPr>
+              <a:t>• 摸清两系统 + 三道鸿沟,定下桥接方案</a:t>
+            </a:r>
+            <a:endParaRPr lang="en-US" sz="1250" dirty="0"/>
+          </a:p>
+          <a:p>
+            <a:pPr indent="0" marL="0">
+              <a:lnSpc>
+                <a:spcPct val="125000"/>
+              </a:lnSpc>
+              <a:buNone/>
+            </a:pPr>
+            <a:r>
+              <a:rPr lang="en-US" sz="1250" dirty="0">
+                <a:solidFill>
+                  <a:srgbClr val="1F2937"/>
+                </a:solidFill>
+                <a:latin typeface="Microsoft YaHei" pitchFamily="34" charset="0"/>
+                <a:ea typeface="Microsoft YaHei" pitchFamily="34" charset="-122"/>
+                <a:cs typeface="Microsoft YaHei" pitchFamily="34" charset="-120"/>
+              </a:rPr>
+              <a:t>• 算法核心可运行:体积增益决策演示 + 单测</a:t>
+            </a:r>
+            <a:endParaRPr lang="en-US" sz="1250" dirty="0"/>
+          </a:p>
+          <a:p>
+            <a:pPr indent="0" marL="0">
+              <a:lnSpc>
+                <a:spcPct val="125000"/>
+              </a:lnSpc>
+              <a:buNone/>
+            </a:pPr>
+            <a:r>
+              <a:rPr lang="en-US" sz="1250" dirty="0">
+                <a:solidFill>
+                  <a:srgbClr val="1F2937"/>
+                </a:solidFill>
+                <a:latin typeface="Microsoft YaHei" pitchFamily="34" charset="0"/>
+                <a:ea typeface="Microsoft YaHei" pitchFamily="34" charset="-122"/>
+                <a:cs typeface="Microsoft YaHei" pitchFamily="34" charset="-120"/>
+              </a:rPr>
+              <a:t>• gbplanner_gain 决策层原型接进 world-model 结构</a:t>
+            </a:r>
+            <a:endParaRPr lang="en-US" sz="1250" dirty="0"/>
+          </a:p>
+          <a:p>
+            <a:pPr indent="0" marL="0">
+              <a:lnSpc>
+                <a:spcPct val="125000"/>
+              </a:lnSpc>
+              <a:buNone/>
+            </a:pPr>
+            <a:r>
+              <a:rPr lang="en-US" sz="1250" dirty="0">
+                <a:solidFill>
+                  <a:srgbClr val="1F2937"/>
+                </a:solidFill>
+                <a:latin typeface="Microsoft YaHei" pitchFamily="34" charset="0"/>
+                <a:ea typeface="Microsoft YaHei" pitchFamily="34" charset="-122"/>
+                <a:cs typeface="Microsoft YaHei" pitchFamily="34" charset="-120"/>
+              </a:rPr>
+              <a:t>• 阶段4 桥接地基:源码证实 I/O 契约 + ROS2 适配器</a:t>
+            </a:r>
+            <a:endParaRPr lang="en-US" sz="1250" dirty="0"/>
+          </a:p>
+          <a:p>
+            <a:pPr indent="0" marL="0">
+              <a:lnSpc>
+                <a:spcPct val="125000"/>
+              </a:lnSpc>
+              <a:buNone/>
+            </a:pPr>
+            <a:r>
+              <a:rPr lang="en-US" sz="1250" dirty="0">
+                <a:solidFill>
+                  <a:srgbClr val="1F2937"/>
+                </a:solidFill>
+                <a:latin typeface="Microsoft YaHei" pitchFamily="34" charset="0"/>
+                <a:ea typeface="Microsoft YaHei" pitchFamily="34" charset="-122"/>
+                <a:cs typeface="Microsoft YaHei" pitchFamily="34" charset="-120"/>
+              </a:rPr>
+              <a:t>• 连修 4 个真 bug(tomllib/空launch参数/%%/venv悬空)</a:t>
+            </a:r>
+            <a:endParaRPr lang="en-US" sz="1250" dirty="0"/>
+          </a:p>
+          <a:p>
+            <a:pPr indent="0" marL="0">
+              <a:lnSpc>
+                <a:spcPct val="125000"/>
+              </a:lnSpc>
+              <a:buNone/>
+            </a:pPr>
+            <a:r>
+              <a:rPr lang="en-US" sz="1250" dirty="0">
+                <a:solidFill>
+                  <a:srgbClr val="1F2937"/>
+                </a:solidFill>
+                <a:latin typeface="Microsoft YaHei" pitchFamily="34" charset="0"/>
+                <a:ea typeface="Microsoft YaHei" pitchFamily="34" charset="-122"/>
+                <a:cs typeface="Microsoft YaHei" pitchFamily="34" charset="-120"/>
+              </a:rPr>
+              <a:t>• 9/9 镜像构建成功;缺陷有代码铁证;文档+私有仓全同步</a:t>
+            </a:r>
+            <a:endParaRPr lang="en-US" sz="1250" dirty="0"/>
+          </a:p>
+        </p:txBody>
+      </p:sp>
+      <p:sp>
+        <p:nvSpPr>
+          <p:cNvPr id="6" name="Shape 4"/>
+          <p:cNvSpPr/>
+          <p:nvPr/>
+        </p:nvSpPr>
+        <p:spPr>
+          <a:xfrm>
+            <a:off x="6309360" y="1645920"/>
+            <a:ext cx="5303520" cy="4389120"/>
+          </a:xfrm>
+          <a:prstGeom prst="roundRect">
+            <a:avLst>
+              <a:gd name="adj" fmla="val 1667"/>
+            </a:avLst>
+          </a:prstGeom>
+          <a:solidFill>
+            <a:srgbClr val="EFF6FF"/>
+          </a:solidFill>
+          <a:ln w="12700">
+            <a:solidFill>
+              <a:srgbClr val="E2E8F0"/>
+            </a:solidFill>
+            <a:prstDash val="solid"/>
+          </a:ln>
+        </p:spPr>
+      </p:sp>
+      <p:sp>
+        <p:nvSpPr>
+          <p:cNvPr id="7" name="Text 5"/>
+          <p:cNvSpPr/>
+          <p:nvPr/>
+        </p:nvSpPr>
+        <p:spPr>
+          <a:xfrm>
+            <a:off x="6537960" y="1828800"/>
+            <a:ext cx="4846320" cy="365760"/>
+          </a:xfrm>
+          <a:prstGeom prst="rect">
+            <a:avLst/>
+          </a:prstGeom>
+          <a:noFill/>
+          <a:ln/>
+        </p:spPr>
+        <p:txBody>
+          <a:bodyPr wrap="square" rtlCol="0" anchor="ctr"/>
+          <a:lstStyle/>
+          <a:p>
+            <a:pPr indent="0" marL="0">
+              <a:buNone/>
+            </a:pPr>
+            <a:r>
+              <a:rPr lang="en-US" sz="1700" b="1" dirty="0">
+                <a:solidFill>
+                  <a:srgbClr val="1E2761"/>
+                </a:solidFill>
+                <a:latin typeface="Microsoft YaHei" pitchFamily="34" charset="0"/>
+                <a:ea typeface="Microsoft YaHei" pitchFamily="34" charset="-122"/>
+                <a:cs typeface="Microsoft YaHei" pitchFamily="34" charset="-120"/>
+              </a:rPr>
+              <a:t>→ 进行中 / 下一步</a:t>
+            </a:r>
+            <a:endParaRPr lang="en-US" sz="1700" dirty="0"/>
+          </a:p>
+        </p:txBody>
+      </p:sp>
+      <p:sp>
+        <p:nvSpPr>
+          <p:cNvPr id="8" name="Text 6"/>
+          <p:cNvSpPr/>
+          <p:nvPr/>
+        </p:nvSpPr>
+        <p:spPr>
+          <a:xfrm>
+            <a:off x="6537960" y="2286000"/>
+            <a:ext cx="4846320" cy="3566160"/>
+          </a:xfrm>
+          <a:prstGeom prst="rect">
+            <a:avLst/>
+          </a:prstGeom>
+          <a:noFill/>
+          <a:ln/>
+        </p:spPr>
+        <p:txBody>
+          <a:bodyPr wrap="square" rtlCol="0" anchor="t"/>
+          <a:lstStyle/>
+          <a:p>
+            <a:pPr indent="0" marL="0">
+              <a:lnSpc>
+                <a:spcPct val="135000"/>
+              </a:lnSpc>
+              <a:buNone/>
+            </a:pPr>
+            <a:r>
+              <a:rPr lang="en-US" sz="1300" dirty="0">
+                <a:solidFill>
+                  <a:srgbClr val="1F2937"/>
+                </a:solidFill>
+                <a:latin typeface="Microsoft YaHei" pitchFamily="34" charset="0"/>
+                <a:ea typeface="Microsoft YaHei" pitchFamily="34" charset="-122"/>
+                <a:cs typeface="Microsoft YaHei" pitchFamily="34" charset="-120"/>
+              </a:rPr>
+              <a:t>• world-model 端到端:新 gazebo-sensor 镜像已重建(venv 修复),重跑 exploration 验证 /scan → SLAM healthy</a:t>
+            </a:r>
+            <a:endParaRPr lang="en-US" sz="1300" dirty="0"/>
+          </a:p>
+          <a:p>
+            <a:pPr indent="0" marL="0">
+              <a:lnSpc>
+                <a:spcPct val="135000"/>
+              </a:lnSpc>
+              <a:buNone/>
+            </a:pPr>
+            <a:r>
+              <a:rPr lang="en-US" sz="1300" dirty="0">
+                <a:solidFill>
+                  <a:srgbClr val="1F2937"/>
+                </a:solidFill>
+                <a:latin typeface="Microsoft YaHei" pitchFamily="34" charset="0"/>
+                <a:ea typeface="Microsoft YaHei" pitchFamily="34" charset="-122"/>
+                <a:cs typeface="Microsoft YaHei" pitchFamily="34" charset="-120"/>
+              </a:rPr>
+              <a:t>• 取 frontier_lite 真实指标,与 GBPlanner 数据对照</a:t>
+            </a:r>
+            <a:endParaRPr lang="en-US" sz="1300" dirty="0"/>
+          </a:p>
+          <a:p>
+            <a:pPr indent="0" marL="0">
+              <a:lnSpc>
+                <a:spcPct val="135000"/>
+              </a:lnSpc>
+              <a:buNone/>
+            </a:pPr>
+            <a:r>
+              <a:rPr lang="en-US" sz="1300" dirty="0">
+                <a:solidFill>
+                  <a:srgbClr val="1F2937"/>
+                </a:solidFill>
+                <a:latin typeface="Microsoft YaHei" pitchFamily="34" charset="0"/>
+                <a:ea typeface="Microsoft YaHei" pitchFamily="34" charset="-122"/>
+                <a:cs typeface="Microsoft YaHei" pitchFamily="34" charset="-120"/>
+              </a:rPr>
+              <a:t>• 完整路线:加 3D 雷达 + 起 ros1_bridge 接真版 GBPlanner</a:t>
+            </a:r>
+            <a:endParaRPr lang="en-US" sz="1300" dirty="0"/>
+          </a:p>
+          <a:p>
+            <a:pPr indent="0" marL="0">
+              <a:lnSpc>
+                <a:spcPct val="135000"/>
+              </a:lnSpc>
+              <a:buNone/>
+            </a:pPr>
+            <a:r>
+              <a:rPr lang="en-US" sz="1300" dirty="0">
+                <a:solidFill>
+                  <a:srgbClr val="1F2937"/>
+                </a:solidFill>
+                <a:latin typeface="Microsoft YaHei" pitchFamily="34" charset="0"/>
+                <a:ea typeface="Microsoft YaHei" pitchFamily="34" charset="-122"/>
+                <a:cs typeface="Microsoft YaHei" pitchFamily="34" charset="-120"/>
+              </a:rPr>
+              <a:t>• 成果归档于自己账号(不对外提交,已拍板)</a:t>
+            </a:r>
+            <a:endParaRPr lang="en-US" sz="1300" dirty="0"/>
+          </a:p>
+        </p:txBody>
+      </p:sp>
+    </p:spTree>
+  </p:cSld>
+  <p:clrMapOvr>
+    <a:masterClrMapping/>
+  </p:clrMapOvr>
+</p:sld>
+</file>
+
+<file path=ppt/slides/slide12.xml><?xml version="1.0" encoding="utf-8"?>
+<p:sld xmlns:a="http://schemas.openxmlformats.org/drawingml/2006/main" xmlns:r="http://schemas.openxmlformats.org/officeDocument/2006/relationships" xmlns:p="http://schemas.openxmlformats.org/presentationml/2006/main">
+  <p:cSld name="Slide 12">
     <p:bg>
       <p:bgPr>
         <a:solidFill>
@@ -4906,7 +5342,7 @@
                 <a:ea typeface="Microsoft YaHei" pitchFamily="34" charset="-122"/>
                 <a:cs typeface="Microsoft YaHei" pitchFamily="34" charset="-120"/>
               </a:rPr>
-              <a:t>真集成进展:两条腿往前推</a:t>
+              <a:t>重磅:官方 GBPlanner 仿真在本机全闭环实测</a:t>
             </a:r>
             <a:endParaRPr lang="en-US" sz="3000" dirty="0"/>
           </a:p>
@@ -4945,26 +5381,50 @@
                 <a:ea typeface="Microsoft YaHei" pitchFamily="34" charset="-122"/>
                 <a:cs typeface="Microsoft YaHei" pitchFamily="34" charset="-120"/>
               </a:rPr>
-              <a:t>决策层原型(ROS2 原生)+ 真版 GBPlanner 桥接地基(锁定方案)</a:t>
+              <a:t>起飞 → voxblox 3D 建图 → RRG 规划 → 自主巡飞 → 时间预算自动返航 → 地图落盘(2026-07-02)</a:t>
             </a:r>
             <a:endParaRPr lang="en-US" sz="1500" dirty="0"/>
           </a:p>
         </p:txBody>
       </p:sp>
-      <p:sp>
-        <p:nvSpPr>
-          <p:cNvPr id="4" name="Shape 2"/>
-          <p:cNvSpPr/>
-          <p:nvPr/>
-        </p:nvSpPr>
-        <p:spPr>
-          <a:xfrm>
-            <a:off x="548640" y="1600200"/>
-            <a:ext cx="5486400" cy="3657600"/>
+      <p:pic>
+        <p:nvPicPr>
+          <p:cNvPr id="4" name="Image 0" descr="C:/CCproject/GBPlanner-WorldModel-Integration/images/exploration_metrics_full.png">    </p:cNvPr>
+          <p:cNvPicPr>
+            <a:picLocks noChangeAspect="1"/>
+          </p:cNvPicPr>
+          <p:nvPr/>
+        </p:nvPicPr>
+        <p:blipFill>
+          <a:blip r:embed="rId1"/>
+          <a:stretch>
+            <a:fillRect/>
+          </a:stretch>
+        </p:blipFill>
+        <p:spPr>
+          <a:xfrm>
+            <a:off x="548640" y="1691640"/>
+            <a:ext cx="6675120" cy="4169664"/>
+          </a:xfrm>
+          <a:prstGeom prst="rect">
+            <a:avLst/>
+          </a:prstGeom>
+        </p:spPr>
+      </p:pic>
+      <p:sp>
+        <p:nvSpPr>
+          <p:cNvPr id="5" name="Shape 2"/>
+          <p:cNvSpPr/>
+          <p:nvPr/>
+        </p:nvSpPr>
+        <p:spPr>
+          <a:xfrm>
+            <a:off x="7452360" y="1691640"/>
+            <a:ext cx="4160520" cy="4169664"/>
           </a:xfrm>
           <a:prstGeom prst="roundRect">
             <a:avLst>
-              <a:gd name="adj" fmla="val 2000"/>
+              <a:gd name="adj" fmla="val 1758"/>
             </a:avLst>
           </a:prstGeom>
           <a:solidFill>
@@ -4980,14 +5440,14 @@
       </p:sp>
       <p:sp>
         <p:nvSpPr>
-          <p:cNvPr id="5" name="Text 3"/>
-          <p:cNvSpPr/>
-          <p:nvPr/>
-        </p:nvSpPr>
-        <p:spPr>
-          <a:xfrm>
-            <a:off x="777240" y="1755648"/>
-            <a:ext cx="5029200" cy="365760"/>
+          <p:cNvPr id="6" name="Text 3"/>
+          <p:cNvSpPr/>
+          <p:nvPr/>
+        </p:nvSpPr>
+        <p:spPr>
+          <a:xfrm>
+            <a:off x="7680960" y="1874520"/>
+            <a:ext cx="3703320" cy="365760"/>
           </a:xfrm>
           <a:prstGeom prst="rect">
             <a:avLst/>
@@ -5011,7 +5471,7 @@
                 <a:ea typeface="Microsoft YaHei" pitchFamily="34" charset="-122"/>
                 <a:cs typeface="Microsoft YaHei" pitchFamily="34" charset="-120"/>
               </a:rPr>
-              <a:t>① 决策层原型:gbplanner_gain</a:t>
+              <a:t>全任务周期量化(实测)</a:t>
             </a:r>
             <a:endParaRPr lang="en-US" sz="1500" dirty="0"/>
           </a:p>
@@ -5019,14 +5479,14 @@
       </p:sp>
       <p:sp>
         <p:nvSpPr>
-          <p:cNvPr id="6" name="Text 4"/>
-          <p:cNvSpPr/>
-          <p:nvPr/>
-        </p:nvSpPr>
-        <p:spPr>
-          <a:xfrm>
-            <a:off x="777240" y="2194560"/>
-            <a:ext cx="5029200" cy="3017520"/>
+          <p:cNvPr id="7" name="Text 4"/>
+          <p:cNvSpPr/>
+          <p:nvPr/>
+        </p:nvSpPr>
+        <p:spPr>
+          <a:xfrm>
+            <a:off x="7680960" y="2331720"/>
+            <a:ext cx="3703320" cy="3383280"/>
           </a:xfrm>
           <a:prstGeom prst="rect">
             <a:avLst/>
@@ -5040,12 +5500,12 @@
           <a:p>
             <a:pPr indent="0" marL="0">
               <a:lnSpc>
-                <a:spcPct val="125000"/>
-              </a:lnSpc>
-              <a:buNone/>
-            </a:pPr>
-            <a:r>
-              <a:rPr lang="en-US" sz="1300" dirty="0">
+                <a:spcPct val="122000"/>
+              </a:lnSpc>
+              <a:buNone/>
+            </a:pPr>
+            <a:r>
+              <a:rPr lang="en-US" sz="1400" dirty="0">
                 <a:solidFill>
                   <a:srgbClr val="1F2937"/>
                 </a:solidFill>
@@ -5053,17 +5513,17 @@
                 <a:ea typeface="Microsoft YaHei" pitchFamily="34" charset="-122"/>
                 <a:cs typeface="Microsoft YaHei" pitchFamily="34" charset="-120"/>
               </a:rPr>
-              <a:t>在 world-model 真实代码里新增可选策略(加法,不动 frontier_lite):
+              <a:t>• 总飞行路径 291.3 米
 </a:t>
             </a:r>
             <a:pPr indent="0" marL="0">
               <a:lnSpc>
-                <a:spcPct val="125000"/>
-              </a:lnSpc>
-              <a:buNone/>
-            </a:pPr>
-            <a:r>
-              <a:rPr lang="en-US" sz="1300" dirty="0">
+                <a:spcPct val="122000"/>
+              </a:lnSpc>
+              <a:buNone/>
+            </a:pPr>
+            <a:r>
+              <a:rPr lang="en-US" sz="1400" dirty="0">
                 <a:solidFill>
                   <a:srgbClr val="1F2937"/>
                 </a:solidFill>
@@ -5071,119 +5531,72 @@
                 <a:ea typeface="Microsoft YaHei" pitchFamily="34" charset="-122"/>
                 <a:cs typeface="Microsoft YaHei" pitchFamily="34" charset="-120"/>
               </a:rPr>
-              <a:t>• 订阅占据栅格 /map → 24 方向光线投射数未知栅格(2D 体积增益)→ 减转向惩罚选向
+              <a:t>• 3D 地图峰值 132,091 体素点
 </a:t>
             </a:r>
             <a:pPr indent="0" marL="0">
               <a:lnSpc>
-                <a:spcPct val="125000"/>
-              </a:lnSpc>
-              <a:buNone/>
-            </a:pPr>
-            <a:r>
-              <a:rPr lang="en-US" sz="1300" b="1" dirty="0">
-                <a:solidFill>
-                  <a:srgbClr val="16A34A"/>
-                </a:solidFill>
-                <a:latin typeface="Microsoft YaHei" pitchFamily="34" charset="0"/>
-                <a:ea typeface="Microsoft YaHei" pitchFamily="34" charset="-122"/>
-                <a:cs typeface="Microsoft YaHei" pitchFamily="34" charset="-120"/>
-              </a:rPr>
-              <a:t>• 把 pattern[i%3] 脚本循环换成看地图挑未知最多方向
+                <a:spcPct val="122000"/>
+              </a:lnSpc>
+              <a:buNone/>
+            </a:pPr>
+            <a:r>
+              <a:rPr lang="en-US" sz="1350" dirty="0">
+                <a:solidFill>
+                  <a:srgbClr val="1F2937"/>
+                </a:solidFill>
+                <a:latin typeface="Microsoft YaHei" pitchFamily="34" charset="0"/>
+                <a:ea typeface="Microsoft YaHei" pitchFamily="34" charset="-122"/>
+                <a:cs typeface="Microsoft YaHei" pitchFamily="34" charset="-120"/>
+              </a:rPr>
+              <a:t>• 480s 预算,t=435s 自动返航
+  (REACHED TIME LIMIT: HOMING)
 </a:t>
             </a:r>
             <a:pPr indent="0" marL="0">
               <a:lnSpc>
-                <a:spcPct val="125000"/>
+                <a:spcPct val="122000"/>
+              </a:lnSpc>
+              <a:buNone/>
+            </a:pPr>
+            <a:r>
+              <a:rPr lang="en-US" sz="1400" dirty="0">
+                <a:solidFill>
+                  <a:srgbClr val="1F2937"/>
+                </a:solidFill>
+                <a:latin typeface="Microsoft YaHei" pitchFamily="34" charset="0"/>
+                <a:ea typeface="Microsoft YaHei" pitchFamily="34" charset="-122"/>
+                <a:cs typeface="Microsoft YaHei" pitchFamily="34" charset="-120"/>
+              </a:rPr>
+              <a:t>• 地图落盘 4MB(可加载复用)
+</a:t>
+            </a:r>
+            <a:pPr indent="0" marL="0">
+              <a:lnSpc>
+                <a:spcPct val="122000"/>
               </a:lnSpc>
               <a:buNone/>
             </a:pPr>
             <a:r>
               <a:rPr lang="en-US" sz="1250" dirty="0">
                 <a:solidFill>
-                  <a:srgbClr val="1F2937"/>
-                </a:solidFill>
-                <a:latin typeface="Microsoft YaHei" pitchFamily="34" charset="0"/>
-                <a:ea typeface="Microsoft YaHei" pitchFamily="34" charset="-122"/>
-                <a:cs typeface="Microsoft YaHei" pitchFamily="34" charset="-120"/>
-              </a:rPr>
-              <a:t>验证:go build/vet/test + 两策略 py_compile 全过
+                  <a:srgbClr val="6B7280"/>
+                </a:solidFill>
+                <a:latin typeface="Microsoft YaHei" pitchFamily="34" charset="0"/>
+                <a:ea typeface="Microsoft YaHei" pitchFamily="34" charset="-122"/>
+                <a:cs typeface="Microsoft YaHei" pitchFamily="34" charset="-120"/>
+              </a:rPr>
+              <a:t>左图:路径长度与地图增长随时间(70 采样点,边探边建图的直接证据)
 </a:t>
             </a:r>
             <a:pPr indent="0" marL="0">
               <a:lnSpc>
-                <a:spcPct val="125000"/>
-              </a:lnSpc>
-              <a:buNone/>
-            </a:pPr>
-            <a:r>
-              <a:rPr lang="en-US" sz="1200" i="1" dirty="0">
-                <a:solidFill>
-                  <a:srgbClr val="B45309"/>
-                </a:solidFill>
-                <a:latin typeface="Microsoft YaHei" pitchFamily="34" charset="0"/>
-                <a:ea typeface="Microsoft YaHei" pitchFamily="34" charset="-122"/>
-                <a:cs typeface="Microsoft YaHei" pitchFamily="34" charset="-120"/>
-              </a:rPr>
-              <a:t>边界:2D 原型,非完整 ROS1 GBPlanner</a:t>
-            </a:r>
-            <a:endParaRPr lang="en-US" sz="1300" dirty="0"/>
-          </a:p>
-        </p:txBody>
-      </p:sp>
-      <p:sp>
-        <p:nvSpPr>
-          <p:cNvPr id="7" name="Shape 5"/>
-          <p:cNvSpPr/>
-          <p:nvPr/>
-        </p:nvSpPr>
-        <p:spPr>
-          <a:xfrm>
-            <a:off x="6309360" y="1600200"/>
-            <a:ext cx="5303520" cy="3657600"/>
-          </a:xfrm>
-          <a:prstGeom prst="roundRect">
-            <a:avLst>
-              <a:gd name="adj" fmla="val 2000"/>
-            </a:avLst>
-          </a:prstGeom>
-          <a:solidFill>
-            <a:srgbClr val="EFF6FF"/>
-          </a:solidFill>
-          <a:ln w="12700">
-            <a:solidFill>
-              <a:srgbClr val="E2E8F0"/>
-            </a:solidFill>
-            <a:prstDash val="solid"/>
-          </a:ln>
-        </p:spPr>
-      </p:sp>
-      <p:sp>
-        <p:nvSpPr>
-          <p:cNvPr id="8" name="Text 6"/>
-          <p:cNvSpPr/>
-          <p:nvPr/>
-        </p:nvSpPr>
-        <p:spPr>
-          <a:xfrm>
-            <a:off x="6537960" y="1755648"/>
-            <a:ext cx="4846320" cy="365760"/>
-          </a:xfrm>
-          <a:prstGeom prst="rect">
-            <a:avLst/>
-          </a:prstGeom>
-          <a:noFill/>
-          <a:ln/>
-        </p:spPr>
-        <p:txBody>
-          <a:bodyPr wrap="square" rtlCol="0" anchor="ctr"/>
-          <a:lstStyle/>
-          <a:p>
-            <a:pPr indent="0" marL="0">
-              <a:buNone/>
-            </a:pPr>
-            <a:r>
-              <a:rPr lang="en-US" sz="1500" b="1" dirty="0">
+                <a:spcPct val="122000"/>
+              </a:lnSpc>
+              <a:buNone/>
+            </a:pPr>
+            <a:r>
+              <a:rPr lang="en-US" sz="1250" b="1" dirty="0">
                 <a:solidFill>
                   <a:srgbClr val="1E2761"/>
                 </a:solidFill>
@@ -5191,189 +5604,9 @@
                 <a:ea typeface="Microsoft YaHei" pitchFamily="34" charset="-122"/>
                 <a:cs typeface="Microsoft YaHei" pitchFamily="34" charset="-120"/>
               </a:rPr>
-              <a:t>② 真版桥接地基:ros1_bridge</a:t>
-            </a:r>
-            <a:endParaRPr lang="en-US" sz="1500" dirty="0"/>
-          </a:p>
-        </p:txBody>
-      </p:sp>
-      <p:sp>
-        <p:nvSpPr>
-          <p:cNvPr id="9" name="Text 7"/>
-          <p:cNvSpPr/>
-          <p:nvPr/>
-        </p:nvSpPr>
-        <p:spPr>
-          <a:xfrm>
-            <a:off x="6537960" y="2194560"/>
-            <a:ext cx="4846320" cy="3017520"/>
-          </a:xfrm>
-          <a:prstGeom prst="rect">
-            <a:avLst/>
-          </a:prstGeom>
-          <a:noFill/>
-          <a:ln/>
-        </p:spPr>
-        <p:txBody>
-          <a:bodyPr wrap="square" rtlCol="0" anchor="t"/>
-          <a:lstStyle/>
-          <a:p>
-            <a:pPr indent="0" marL="0">
-              <a:lnSpc>
-                <a:spcPct val="122000"/>
-              </a:lnSpc>
-              <a:buNone/>
-            </a:pPr>
-            <a:r>
-              <a:rPr lang="en-US" sz="1300" dirty="0">
-                <a:solidFill>
-                  <a:srgbClr val="1F2937"/>
-                </a:solidFill>
-                <a:latin typeface="Microsoft YaHei" pitchFamily="34" charset="0"/>
-                <a:ea typeface="Microsoft YaHei" pitchFamily="34" charset="-122"/>
-                <a:cs typeface="Microsoft YaHei" pitchFamily="34" charset="-120"/>
-              </a:rPr>
-              <a:t>从 gbplanner-ref 源码逐条证实真版 GBPlanner 的 I/O 契约:
-</a:t>
-            </a:r>
-            <a:pPr indent="0" marL="0">
-              <a:lnSpc>
-                <a:spcPct val="122000"/>
-              </a:lnSpc>
-              <a:buNone/>
-            </a:pPr>
-            <a:r>
-              <a:rPr lang="en-US" sz="1300" dirty="0">
-                <a:solidFill>
-                  <a:srgbClr val="1F2937"/>
-                </a:solidFill>
-                <a:latin typeface="Microsoft YaHei" pitchFamily="34" charset="0"/>
-                <a:ea typeface="Microsoft YaHei" pitchFamily="34" charset="-122"/>
-                <a:cs typeface="Microsoft YaHei" pitchFamily="34" charset="-120"/>
-              </a:rPr>
-              <a:t>• 进:点云 PointCloud2 + 里程计 + TF(标准类型)
-</a:t>
-            </a:r>
-            <a:pPr indent="0" marL="0">
-              <a:lnSpc>
-                <a:spcPct val="122000"/>
-              </a:lnSpc>
-              <a:buNone/>
-            </a:pPr>
-            <a:r>
-              <a:rPr lang="en-US" sz="1300" dirty="0">
-                <a:solidFill>
-                  <a:srgbClr val="1F2937"/>
-                </a:solidFill>
-                <a:latin typeface="Microsoft YaHei" pitchFamily="34" charset="0"/>
-                <a:ea typeface="Microsoft YaHei" pitchFamily="34" charset="-122"/>
-                <a:cs typeface="Microsoft YaHei" pitchFamily="34" charset="-120"/>
-              </a:rPr>
-              <a:t>• 出:command/trajectory(标准 MultiDOFJointTrajectory)
-</a:t>
-            </a:r>
-            <a:pPr indent="0" marL="0">
-              <a:lnSpc>
-                <a:spcPct val="122000"/>
-              </a:lnSpc>
-              <a:buNone/>
-            </a:pPr>
-            <a:r>
-              <a:rPr lang="en-US" sz="1300" b="1" dirty="0">
-                <a:solidFill>
-                  <a:srgbClr val="1E2761"/>
-                </a:solidFill>
-                <a:latin typeface="Microsoft YaHei" pitchFamily="34" charset="0"/>
-                <a:ea typeface="Microsoft YaHei" pitchFamily="34" charset="-122"/>
-                <a:cs typeface="Microsoft YaHei" pitchFamily="34" charset="-120"/>
-              </a:rPr>
-              <a:t>• 关键去风险:自定义 planner_msgs 留 ROS1 内,跨桥全是标准类型 → ros1_bridge 开箱
-</a:t>
-            </a:r>
-            <a:pPr indent="0" marL="0">
-              <a:lnSpc>
-                <a:spcPct val="122000"/>
-              </a:lnSpc>
-              <a:buNone/>
-            </a:pPr>
-            <a:r>
-              <a:rPr lang="en-US" sz="1250" dirty="0">
-                <a:solidFill>
-                  <a:srgbClr val="1F2937"/>
-                </a:solidFill>
-                <a:latin typeface="Microsoft YaHei" pitchFamily="34" charset="0"/>
-                <a:ea typeface="Microsoft YaHei" pitchFamily="34" charset="-122"/>
-                <a:cs typeface="Microsoft YaHei" pitchFamily="34" charset="-120"/>
-              </a:rPr>
-              <a:t>已产出:桥接话题映射 + ROS2 出口适配器(轨迹→intent,py_compile 过)</a:t>
-            </a:r>
-            <a:endParaRPr lang="en-US" sz="1300" dirty="0"/>
-          </a:p>
-        </p:txBody>
-      </p:sp>
-      <p:sp>
-        <p:nvSpPr>
-          <p:cNvPr id="10" name="Shape 8"/>
-          <p:cNvSpPr/>
-          <p:nvPr/>
-        </p:nvSpPr>
-        <p:spPr>
-          <a:xfrm>
-            <a:off x="548640" y="5440680"/>
-            <a:ext cx="11064240" cy="640080"/>
-          </a:xfrm>
-          <a:prstGeom prst="roundRect">
-            <a:avLst>
-              <a:gd name="adj" fmla="val 11429"/>
-            </a:avLst>
-          </a:prstGeom>
-          <a:solidFill>
-            <a:srgbClr val="FFF7ED"/>
-          </a:solidFill>
-          <a:ln w="12700">
-            <a:solidFill>
-              <a:srgbClr val="E2E8F0"/>
-            </a:solidFill>
-            <a:prstDash val="solid"/>
-          </a:ln>
-        </p:spPr>
-      </p:sp>
-      <p:sp>
-        <p:nvSpPr>
-          <p:cNvPr id="11" name="Text 9"/>
-          <p:cNvSpPr/>
-          <p:nvPr/>
-        </p:nvSpPr>
-        <p:spPr>
-          <a:xfrm>
-            <a:off x="777240" y="5532120"/>
-            <a:ext cx="10607040" cy="457200"/>
-          </a:xfrm>
-          <a:prstGeom prst="rect">
-            <a:avLst/>
-          </a:prstGeom>
-          <a:noFill/>
-          <a:ln/>
-        </p:spPr>
-        <p:txBody>
-          <a:bodyPr wrap="square" rtlCol="0" anchor="t"/>
-          <a:lstStyle/>
-          <a:p>
-            <a:pPr indent="0" marL="0">
-              <a:buNone/>
-            </a:pPr>
-            <a:r>
-              <a:rPr lang="en-US" sz="1300" dirty="0">
-                <a:solidFill>
-                  <a:srgbClr val="B45309"/>
-                </a:solidFill>
-                <a:latin typeface="Microsoft YaHei" pitchFamily="34" charset="0"/>
-                <a:ea typeface="Microsoft YaHei" pitchFamily="34" charset="-122"/>
-                <a:cs typeface="Microsoft YaHei" pitchFamily="34" charset="-120"/>
-              </a:rPr>
-              <a:t>诚实边界:完整端到端(加 3D 雷达 + 起桥 + 两侧同跑)是后续重活,受 world-model 运行时阻塞(见下页)。</a:t>
-            </a:r>
-            <a:endParaRPr lang="en-US" sz="1300" dirty="0"/>
+              <a:t>两条命令可复现:run_light.sh + takeoff_and_explore.sh</a:t>
+            </a:r>
+            <a:endParaRPr lang="en-US" sz="1400" dirty="0"/>
           </a:p>
         </p:txBody>
       </p:sp>
@@ -5442,7 +5675,7 @@
                 <a:ea typeface="Microsoft YaHei" pitchFamily="34" charset="-122"/>
                 <a:cs typeface="Microsoft YaHei" pitchFamily="34" charset="-120"/>
               </a:rPr>
-              <a:t>工程战果:连修 3 个 humble 真 bug,把平台往前推</a:t>
+              <a:t>真集成进展:两条腿往前推</a:t>
             </a:r>
             <a:endParaRPr lang="en-US" sz="3000" dirty="0"/>
           </a:p>
@@ -5481,7 +5714,7 @@
                 <a:ea typeface="Microsoft YaHei" pitchFamily="34" charset="-122"/>
                 <a:cs typeface="Microsoft YaHei" pitchFamily="34" charset="-120"/>
               </a:rPr>
-              <a:t>只信真实产物(docker images / 日志 / py_compile),不信退出码</a:t>
+              <a:t>决策层原型(ROS2 原生)+ 真版 GBPlanner 桥接地基(锁定方案)</a:t>
             </a:r>
             <a:endParaRPr lang="en-US" sz="1500" dirty="0"/>
           </a:p>
@@ -5495,16 +5728,16 @@
         </p:nvSpPr>
         <p:spPr>
           <a:xfrm>
-            <a:off x="548640" y="1645920"/>
-            <a:ext cx="6766560" cy="4389120"/>
+            <a:off x="548640" y="1600200"/>
+            <a:ext cx="5486400" cy="3657600"/>
           </a:xfrm>
           <a:prstGeom prst="roundRect">
             <a:avLst>
-              <a:gd name="adj" fmla="val 1667"/>
+              <a:gd name="adj" fmla="val 2000"/>
             </a:avLst>
           </a:prstGeom>
           <a:solidFill>
-            <a:srgbClr val="0F172A"/>
+            <a:srgbClr val="F0FDF4"/>
           </a:solidFill>
           <a:ln w="12700">
             <a:solidFill>
@@ -5522,8 +5755,8 @@
         </p:nvSpPr>
         <p:spPr>
           <a:xfrm>
-            <a:off x="777240" y="1810512"/>
-            <a:ext cx="6309360" cy="365760"/>
+            <a:off x="777240" y="1755648"/>
+            <a:ext cx="5029200" cy="365760"/>
           </a:xfrm>
           <a:prstGeom prst="rect">
             <a:avLst/>
@@ -5539,17 +5772,17 @@
               <a:buNone/>
             </a:pPr>
             <a:r>
-              <a:rPr lang="en-US" sz="1450" b="1" dirty="0">
-                <a:solidFill>
-                  <a:srgbClr val="CADCFC"/>
-                </a:solidFill>
-                <a:latin typeface="Microsoft YaHei" pitchFamily="34" charset="0"/>
-                <a:ea typeface="Microsoft YaHei" pitchFamily="34" charset="-122"/>
-                <a:cs typeface="Microsoft YaHei" pitchFamily="34" charset="-120"/>
-              </a:rPr>
-              <a:t>给 world-model 作者的真实可提交修复(均有实测证据)</a:t>
-            </a:r>
-            <a:endParaRPr lang="en-US" sz="1450" dirty="0"/>
+              <a:rPr lang="en-US" sz="1500" b="1" dirty="0">
+                <a:solidFill>
+                  <a:srgbClr val="16A34A"/>
+                </a:solidFill>
+                <a:latin typeface="Microsoft YaHei" pitchFamily="34" charset="0"/>
+                <a:ea typeface="Microsoft YaHei" pitchFamily="34" charset="-122"/>
+                <a:cs typeface="Microsoft YaHei" pitchFamily="34" charset="-120"/>
+              </a:rPr>
+              <a:t>① 决策层原型:gbplanner_gain</a:t>
+            </a:r>
+            <a:endParaRPr lang="en-US" sz="1500" dirty="0"/>
           </a:p>
         </p:txBody>
       </p:sp>
@@ -5561,8 +5794,8 @@
         </p:nvSpPr>
         <p:spPr>
           <a:xfrm>
-            <a:off x="777240" y="2240280"/>
-            <a:ext cx="6309360" cy="3657600"/>
+            <a:off x="777240" y="2194560"/>
+            <a:ext cx="5029200" cy="3017520"/>
           </a:xfrm>
           <a:prstGeom prst="rect">
             <a:avLst/>
@@ -5576,76 +5809,92 @@
           <a:p>
             <a:pPr indent="0" marL="0">
               <a:lnSpc>
-                <a:spcPct val="120000"/>
+                <a:spcPct val="125000"/>
               </a:lnSpc>
               <a:buNone/>
             </a:pPr>
             <a:r>
               <a:rPr lang="en-US" sz="1300" dirty="0">
                 <a:solidFill>
-                  <a:srgbClr val="A7F3D0"/>
-                </a:solidFill>
-                <a:latin typeface="Microsoft YaHei" pitchFamily="34" charset="0"/>
-                <a:ea typeface="Microsoft YaHei" pitchFamily="34" charset="-122"/>
-                <a:cs typeface="Microsoft YaHei" pitchFamily="34" charset="-120"/>
-              </a:rPr>
-              <a:t>① tomllib(头号):SLAM 在 Py3.10 一启动就崩(tomllib 是 3.11+)
-   → 回退 tomli;实测重跑后 SLAM 越过此崩溃
+                  <a:srgbClr val="1F2937"/>
+                </a:solidFill>
+                <a:latin typeface="Microsoft YaHei" pitchFamily="34" charset="0"/>
+                <a:ea typeface="Microsoft YaHei" pitchFamily="34" charset="-122"/>
+                <a:cs typeface="Microsoft YaHei" pitchFamily="34" charset="-120"/>
+              </a:rPr>
+              <a:t>在 world-model 真实代码里新增可选策略(加法,不动 frontier_lite):
 </a:t>
             </a:r>
             <a:pPr indent="0" marL="0">
               <a:lnSpc>
-                <a:spcPct val="120000"/>
+                <a:spcPct val="125000"/>
               </a:lnSpc>
               <a:buNone/>
             </a:pPr>
             <a:r>
               <a:rPr lang="en-US" sz="1300" dirty="0">
                 <a:solidFill>
-                  <a:srgbClr val="A7F3D0"/>
-                </a:solidFill>
-                <a:latin typeface="Microsoft YaHei" pitchFamily="34" charset="0"/>
-                <a:ea typeface="Microsoft YaHei" pitchFamily="34" charset="-122"/>
-                <a:cs typeface="Microsoft YaHei" pitchFamily="34" charset="-120"/>
-              </a:rPr>
-              <a:t>② 空 launch 参数:humble 拒绝空值 name:= → SLAM 起不来
-   → 跳过空参;实测 cartographer 节点真正运行起来
+                  <a:srgbClr val="1F2937"/>
+                </a:solidFill>
+                <a:latin typeface="Microsoft YaHei" pitchFamily="34" charset="0"/>
+                <a:ea typeface="Microsoft YaHei" pitchFamily="34" charset="-122"/>
+                <a:cs typeface="Microsoft YaHei" pitchFamily="34" charset="-120"/>
+              </a:rPr>
+              <a:t>• 订阅占据栅格 /map → 24 方向光线投射数未知栅格(2D 体积增益)→ 减转向惩罚选向
 </a:t>
             </a:r>
             <a:pPr indent="0" marL="0">
               <a:lnSpc>
-                <a:spcPct val="120000"/>
-              </a:lnSpc>
-              <a:buNone/>
-            </a:pPr>
-            <a:r>
-              <a:rPr lang="en-US" sz="1300" dirty="0">
-                <a:solidFill>
-                  <a:srgbClr val="CADCFC"/>
-                </a:solidFill>
-                <a:latin typeface="Microsoft YaHei" pitchFamily="34" charset="0"/>
-                <a:ea typeface="Microsoft YaHei" pitchFamily="34" charset="-122"/>
-                <a:cs typeface="Microsoft YaHei" pitchFamily="34" charset="-120"/>
-              </a:rPr>
-              <a:t>③ 模板 %% 编译 bug:生成脚本无法编译 → 改单 %(独立次要)
+                <a:spcPct val="125000"/>
+              </a:lnSpc>
+              <a:buNone/>
+            </a:pPr>
+            <a:r>
+              <a:rPr lang="en-US" sz="1300" b="1" dirty="0">
+                <a:solidFill>
+                  <a:srgbClr val="16A34A"/>
+                </a:solidFill>
+                <a:latin typeface="Microsoft YaHei" pitchFamily="34" charset="0"/>
+                <a:ea typeface="Microsoft YaHei" pitchFamily="34" charset="-122"/>
+                <a:cs typeface="Microsoft YaHei" pitchFamily="34" charset="-120"/>
+              </a:rPr>
+              <a:t>• 把 pattern[i%3] 脚本循环换成看地图挑未知最多方向
 </a:t>
             </a:r>
             <a:pPr indent="0" marL="0">
               <a:lnSpc>
-                <a:spcPct val="120000"/>
-              </a:lnSpc>
-              <a:buNone/>
-            </a:pPr>
-            <a:r>
-              <a:rPr lang="en-US" sz="1350" b="1" dirty="0">
-                <a:solidFill>
-                  <a:srgbClr val="FFFFFF"/>
-                </a:solidFill>
-                <a:latin typeface="Microsoft YaHei" pitchFamily="34" charset="0"/>
-                <a:ea typeface="Microsoft YaHei" pitchFamily="34" charset="-122"/>
-                <a:cs typeface="Microsoft YaHei" pitchFamily="34" charset="-120"/>
-              </a:rPr>
-              <a:t>成效:world-model 从「装不起来」→ 9 镜像齐 → SLAM 从「一崩」推进到「cartographer 真运行,只差激光数据」</a:t>
+                <a:spcPct val="125000"/>
+              </a:lnSpc>
+              <a:buNone/>
+            </a:pPr>
+            <a:r>
+              <a:rPr lang="en-US" sz="1250" dirty="0">
+                <a:solidFill>
+                  <a:srgbClr val="1F2937"/>
+                </a:solidFill>
+                <a:latin typeface="Microsoft YaHei" pitchFamily="34" charset="0"/>
+                <a:ea typeface="Microsoft YaHei" pitchFamily="34" charset="-122"/>
+                <a:cs typeface="Microsoft YaHei" pitchFamily="34" charset="-120"/>
+              </a:rPr>
+              <a:t>验证:go build/vet/test + 两策略 py_compile 全过
+</a:t>
+            </a:r>
+            <a:pPr indent="0" marL="0">
+              <a:lnSpc>
+                <a:spcPct val="125000"/>
+              </a:lnSpc>
+              <a:buNone/>
+            </a:pPr>
+            <a:r>
+              <a:rPr lang="en-US" sz="1200" i="1" dirty="0">
+                <a:solidFill>
+                  <a:srgbClr val="B45309"/>
+                </a:solidFill>
+                <a:latin typeface="Microsoft YaHei" pitchFamily="34" charset="0"/>
+                <a:ea typeface="Microsoft YaHei" pitchFamily="34" charset="-122"/>
+                <a:cs typeface="Microsoft YaHei" pitchFamily="34" charset="-120"/>
+              </a:rPr>
+              <a:t>边界:2D 原型,非完整 ROS1 GBPlanner</a:t>
             </a:r>
             <a:endParaRPr lang="en-US" sz="1300" dirty="0"/>
           </a:p>
@@ -5659,12 +5908,12 @@
         </p:nvSpPr>
         <p:spPr>
           <a:xfrm>
-            <a:off x="7589520" y="1645920"/>
-            <a:ext cx="4023360" cy="4389120"/>
+            <a:off x="6309360" y="1600200"/>
+            <a:ext cx="5303520" cy="3657600"/>
           </a:xfrm>
           <a:prstGeom prst="roundRect">
             <a:avLst>
-              <a:gd name="adj" fmla="val 1818"/>
+              <a:gd name="adj" fmla="val 2000"/>
             </a:avLst>
           </a:prstGeom>
           <a:solidFill>
@@ -5686,8 +5935,8 @@
         </p:nvSpPr>
         <p:spPr>
           <a:xfrm>
-            <a:off x="7818120" y="1810512"/>
-            <a:ext cx="3566160" cy="365760"/>
+            <a:off x="6537960" y="1755648"/>
+            <a:ext cx="4846320" cy="365760"/>
           </a:xfrm>
           <a:prstGeom prst="rect">
             <a:avLst/>
@@ -5703,7 +5952,7 @@
               <a:buNone/>
             </a:pPr>
             <a:r>
-              <a:rPr lang="en-US" sz="1450" b="1" dirty="0">
+              <a:rPr lang="en-US" sz="1500" b="1" dirty="0">
                 <a:solidFill>
                   <a:srgbClr val="1E2761"/>
                 </a:solidFill>
@@ -5711,9 +5960,9 @@
                 <a:ea typeface="Microsoft YaHei" pitchFamily="34" charset="-122"/>
                 <a:cs typeface="Microsoft YaHei" pitchFamily="34" charset="-120"/>
               </a:rPr>
-              <a:t>PR + Issue 已备好</a:t>
-            </a:r>
-            <a:endParaRPr lang="en-US" sz="1450" dirty="0"/>
+              <a:t>② 真版桥接地基:ros1_bridge</a:t>
+            </a:r>
+            <a:endParaRPr lang="en-US" sz="1500" dirty="0"/>
           </a:p>
         </p:txBody>
       </p:sp>
@@ -5725,8 +5974,8 @@
         </p:nvSpPr>
         <p:spPr>
           <a:xfrm>
-            <a:off x="7818120" y="2240280"/>
-            <a:ext cx="3566160" cy="3657600"/>
+            <a:off x="6537960" y="2194560"/>
+            <a:ext cx="4846320" cy="3017520"/>
           </a:xfrm>
           <a:prstGeom prst="rect">
             <a:avLst/>
@@ -5740,68 +5989,150 @@
           <a:p>
             <a:pPr indent="0" marL="0">
               <a:lnSpc>
-                <a:spcPct val="125000"/>
+                <a:spcPct val="122000"/>
+              </a:lnSpc>
+              <a:buNone/>
+            </a:pPr>
+            <a:r>
+              <a:rPr lang="en-US" sz="1300" dirty="0">
+                <a:solidFill>
+                  <a:srgbClr val="1F2937"/>
+                </a:solidFill>
+                <a:latin typeface="Microsoft YaHei" pitchFamily="34" charset="0"/>
+                <a:ea typeface="Microsoft YaHei" pitchFamily="34" charset="-122"/>
+                <a:cs typeface="Microsoft YaHei" pitchFamily="34" charset="-120"/>
+              </a:rPr>
+              <a:t>从 gbplanner-ref 源码逐条证实真版 GBPlanner 的 I/O 契约:
+</a:t>
+            </a:r>
+            <a:pPr indent="0" marL="0">
+              <a:lnSpc>
+                <a:spcPct val="122000"/>
+              </a:lnSpc>
+              <a:buNone/>
+            </a:pPr>
+            <a:r>
+              <a:rPr lang="en-US" sz="1300" dirty="0">
+                <a:solidFill>
+                  <a:srgbClr val="1F2937"/>
+                </a:solidFill>
+                <a:latin typeface="Microsoft YaHei" pitchFamily="34" charset="0"/>
+                <a:ea typeface="Microsoft YaHei" pitchFamily="34" charset="-122"/>
+                <a:cs typeface="Microsoft YaHei" pitchFamily="34" charset="-120"/>
+              </a:rPr>
+              <a:t>• 进:点云 PointCloud2 + 里程计 + TF(标准类型)
+</a:t>
+            </a:r>
+            <a:pPr indent="0" marL="0">
+              <a:lnSpc>
+                <a:spcPct val="122000"/>
+              </a:lnSpc>
+              <a:buNone/>
+            </a:pPr>
+            <a:r>
+              <a:rPr lang="en-US" sz="1300" dirty="0">
+                <a:solidFill>
+                  <a:srgbClr val="1F2937"/>
+                </a:solidFill>
+                <a:latin typeface="Microsoft YaHei" pitchFamily="34" charset="0"/>
+                <a:ea typeface="Microsoft YaHei" pitchFamily="34" charset="-122"/>
+                <a:cs typeface="Microsoft YaHei" pitchFamily="34" charset="-120"/>
+              </a:rPr>
+              <a:t>• 出:command/trajectory(标准 MultiDOFJointTrajectory)
+</a:t>
+            </a:r>
+            <a:pPr indent="0" marL="0">
+              <a:lnSpc>
+                <a:spcPct val="122000"/>
               </a:lnSpc>
               <a:buNone/>
             </a:pPr>
             <a:r>
               <a:rPr lang="en-US" sz="1300" b="1" dirty="0">
                 <a:solidFill>
+                  <a:srgbClr val="1E2761"/>
+                </a:solidFill>
+                <a:latin typeface="Microsoft YaHei" pitchFamily="34" charset="0"/>
+                <a:ea typeface="Microsoft YaHei" pitchFamily="34" charset="-122"/>
+                <a:cs typeface="Microsoft YaHei" pitchFamily="34" charset="-120"/>
+              </a:rPr>
+              <a:t>• 关键去风险:自定义 planner_msgs 留 ROS1 内,跨桥全是标准类型 → ros1_bridge 开箱
+</a:t>
+            </a:r>
+            <a:pPr indent="0" marL="0">
+              <a:lnSpc>
+                <a:spcPct val="122000"/>
+              </a:lnSpc>
+              <a:buNone/>
+            </a:pPr>
+            <a:r>
+              <a:rPr lang="en-US" sz="1250" dirty="0">
+                <a:solidFill>
                   <a:srgbClr val="1F2937"/>
                 </a:solidFill>
                 <a:latin typeface="Microsoft YaHei" pitchFamily="34" charset="0"/>
                 <a:ea typeface="Microsoft YaHei" pitchFamily="34" charset="-122"/>
                 <a:cs typeface="Microsoft YaHei" pitchFamily="34" charset="-120"/>
               </a:rPr>
-              <a:t>1 个 PR(4 commit:3 fix + 1 feat)+ 1 个 Issue
-</a:t>
-            </a:r>
-            <a:pPr indent="0" marL="0">
-              <a:lnSpc>
-                <a:spcPct val="125000"/>
-              </a:lnSpc>
-              <a:buNone/>
-            </a:pPr>
-            <a:r>
-              <a:rPr lang="en-US" sz="1250" dirty="0">
-                <a:solidFill>
-                  <a:srgbClr val="1F2937"/>
-                </a:solidFill>
-                <a:latin typeface="Microsoft YaHei" pitchFamily="34" charset="0"/>
-                <a:ea typeface="Microsoft YaHei" pitchFamily="34" charset="-122"/>
-                <a:cs typeface="Microsoft YaHei" pitchFamily="34" charset="-120"/>
-              </a:rPr>
-              <a:t>物料齐全(integration/world-model-PR/):
-</a:t>
-            </a:r>
-            <a:pPr indent="0" marL="0">
-              <a:lnSpc>
-                <a:spcPct val="125000"/>
-              </a:lnSpc>
-              <a:buNone/>
-            </a:pPr>
-            <a:r>
-              <a:rPr lang="en-US" sz="1250" dirty="0">
-                <a:solidFill>
-                  <a:srgbClr val="1F2937"/>
-                </a:solidFill>
-                <a:latin typeface="Microsoft YaHei" pitchFamily="34" charset="0"/>
-                <a:ea typeface="Microsoft YaHei" pitchFamily="34" charset="-122"/>
-                <a:cs typeface="Microsoft YaHei" pitchFamily="34" charset="-120"/>
-              </a:rPr>
-              <a:t>• PR/Issue 正文 + 补丁
-• 修复/渲染证据
-• 手动提交分步教程
-</a:t>
-            </a:r>
-            <a:pPr indent="0" marL="0">
-              <a:lnSpc>
-                <a:spcPct val="125000"/>
-              </a:lnSpc>
-              <a:buNone/>
-            </a:pPr>
-            <a:r>
-              <a:rPr lang="en-US" sz="1300" b="1" dirty="0">
+              <a:t>已产出:桥接话题映射 + ROS2 出口适配器(轨迹→intent,py_compile 过)</a:t>
+            </a:r>
+            <a:endParaRPr lang="en-US" sz="1300" dirty="0"/>
+          </a:p>
+        </p:txBody>
+      </p:sp>
+      <p:sp>
+        <p:nvSpPr>
+          <p:cNvPr id="10" name="Shape 8"/>
+          <p:cNvSpPr/>
+          <p:nvPr/>
+        </p:nvSpPr>
+        <p:spPr>
+          <a:xfrm>
+            <a:off x="548640" y="5440680"/>
+            <a:ext cx="11064240" cy="640080"/>
+          </a:xfrm>
+          <a:prstGeom prst="roundRect">
+            <a:avLst>
+              <a:gd name="adj" fmla="val 11429"/>
+            </a:avLst>
+          </a:prstGeom>
+          <a:solidFill>
+            <a:srgbClr val="FFF7ED"/>
+          </a:solidFill>
+          <a:ln w="12700">
+            <a:solidFill>
+              <a:srgbClr val="E2E8F0"/>
+            </a:solidFill>
+            <a:prstDash val="solid"/>
+          </a:ln>
+        </p:spPr>
+      </p:sp>
+      <p:sp>
+        <p:nvSpPr>
+          <p:cNvPr id="11" name="Text 9"/>
+          <p:cNvSpPr/>
+          <p:nvPr/>
+        </p:nvSpPr>
+        <p:spPr>
+          <a:xfrm>
+            <a:off x="777240" y="5532120"/>
+            <a:ext cx="10607040" cy="457200"/>
+          </a:xfrm>
+          <a:prstGeom prst="rect">
+            <a:avLst/>
+          </a:prstGeom>
+          <a:noFill/>
+          <a:ln/>
+        </p:spPr>
+        <p:txBody>
+          <a:bodyPr wrap="square" rtlCol="0" anchor="t"/>
+          <a:lstStyle/>
+          <a:p>
+            <a:pPr indent="0" marL="0">
+              <a:buNone/>
+            </a:pPr>
+            <a:r>
+              <a:rPr lang="en-US" sz="1300" dirty="0">
                 <a:solidFill>
                   <a:srgbClr val="B45309"/>
                 </a:solidFill>
@@ -5809,7 +6140,7 @@
                 <a:ea typeface="Microsoft YaHei" pitchFamily="34" charset="-122"/>
                 <a:cs typeface="Microsoft YaHei" pitchFamily="34" charset="-120"/>
               </a:rPr>
-              <a:t>状态:待亲自提交到作者仓库 → 任务闭环</a:t>
+              <a:t>诚实边界:完整端到端(加 3D 雷达 + 起桥 + 两侧同跑)是后续重活,受 world-model 运行时阻塞(见下页)。</a:t>
             </a:r>
             <a:endParaRPr lang="en-US" sz="1300" dirty="0"/>
           </a:p>
@@ -5880,7 +6211,7 @@
                 <a:ea typeface="Microsoft YaHei" pitchFamily="34" charset="-122"/>
                 <a:cs typeface="Microsoft YaHei" pitchFamily="34" charset="-120"/>
               </a:rPr>
-              <a:t>一次探索:复现仿真平台(及时止损)</a:t>
+              <a:t>工程战果:连修 3 个 humble 真 bug,把平台往前推</a:t>
             </a:r>
             <a:endParaRPr lang="en-US" sz="3000" dirty="0"/>
           </a:p>
@@ -5888,22 +6219,61 @@
       </p:sp>
       <p:sp>
         <p:nvSpPr>
-          <p:cNvPr id="3" name="Shape 1"/>
+          <p:cNvPr id="3" name="Text 1"/>
+          <p:cNvSpPr/>
+          <p:nvPr/>
+        </p:nvSpPr>
+        <p:spPr>
+          <a:xfrm>
+            <a:off x="566928" y="1051560"/>
+            <a:ext cx="10972800" cy="411480"/>
+          </a:xfrm>
+          <a:prstGeom prst="rect">
+            <a:avLst/>
+          </a:prstGeom>
+          <a:noFill/>
+          <a:ln/>
+        </p:spPr>
+        <p:txBody>
+          <a:bodyPr wrap="square" rtlCol="0" anchor="ctr"/>
+          <a:lstStyle/>
+          <a:p>
+            <a:pPr indent="0" marL="0">
+              <a:buNone/>
+            </a:pPr>
+            <a:r>
+              <a:rPr lang="en-US" sz="1500" dirty="0">
+                <a:solidFill>
+                  <a:srgbClr val="6B7280"/>
+                </a:solidFill>
+                <a:latin typeface="Microsoft YaHei" pitchFamily="34" charset="0"/>
+                <a:ea typeface="Microsoft YaHei" pitchFamily="34" charset="-122"/>
+                <a:cs typeface="Microsoft YaHei" pitchFamily="34" charset="-120"/>
+              </a:rPr>
+              <a:t>只信真实产物(docker images / 日志 / py_compile),不信退出码</a:t>
+            </a:r>
+            <a:endParaRPr lang="en-US" sz="1500" dirty="0"/>
+          </a:p>
+        </p:txBody>
+      </p:sp>
+      <p:sp>
+        <p:nvSpPr>
+          <p:cNvPr id="4" name="Shape 2"/>
           <p:cNvSpPr/>
           <p:nvPr/>
         </p:nvSpPr>
         <p:spPr>
           <a:xfrm>
             <a:off x="548640" y="1645920"/>
-            <a:ext cx="11064240" cy="1554480"/>
+            <a:ext cx="6766560" cy="4389120"/>
           </a:xfrm>
           <a:prstGeom prst="roundRect">
             <a:avLst>
-              <a:gd name="adj" fmla="val 4706"/>
+              <a:gd name="adj" fmla="val 1667"/>
             </a:avLst>
           </a:prstGeom>
           <a:solidFill>
-            <a:srgbClr val="F1F5F9"/>
+            <a:srgbClr val="0F172A"/>
           </a:solidFill>
           <a:ln w="12700">
             <a:solidFill>
@@ -5915,14 +6285,14 @@
       </p:sp>
       <p:sp>
         <p:nvSpPr>
-          <p:cNvPr id="4" name="Text 2"/>
-          <p:cNvSpPr/>
-          <p:nvPr/>
-        </p:nvSpPr>
-        <p:spPr>
-          <a:xfrm>
-            <a:off x="822960" y="1828800"/>
-            <a:ext cx="10515600" cy="457200"/>
+          <p:cNvPr id="5" name="Text 3"/>
+          <p:cNvSpPr/>
+          <p:nvPr/>
+        </p:nvSpPr>
+        <p:spPr>
+          <a:xfrm>
+            <a:off x="777240" y="1810512"/>
+            <a:ext cx="6309360" cy="365760"/>
           </a:xfrm>
           <a:prstGeom prst="rect">
             <a:avLst/>
@@ -5938,30 +6308,30 @@
               <a:buNone/>
             </a:pPr>
             <a:r>
-              <a:rPr lang="en-US" sz="1600" b="1" dirty="0">
-                <a:solidFill>
-                  <a:srgbClr val="1F2937"/>
-                </a:solidFill>
-                <a:latin typeface="Microsoft YaHei" pitchFamily="34" charset="0"/>
-                <a:ea typeface="Microsoft YaHei" pitchFamily="34" charset="-122"/>
-                <a:cs typeface="Microsoft YaHei" pitchFamily="34" charset="-120"/>
-              </a:rPr>
-              <a:t>我们曾尝试在本机完整复现 world-model 的 9 个 Docker 镜像,以端到端运行平台。</a:t>
-            </a:r>
-            <a:endParaRPr lang="en-US" sz="1600" dirty="0"/>
-          </a:p>
-        </p:txBody>
-      </p:sp>
-      <p:sp>
-        <p:nvSpPr>
-          <p:cNvPr id="5" name="Text 3"/>
-          <p:cNvSpPr/>
-          <p:nvPr/>
-        </p:nvSpPr>
-        <p:spPr>
-          <a:xfrm>
-            <a:off x="822960" y="2331720"/>
-            <a:ext cx="10515600" cy="731520"/>
+              <a:rPr lang="en-US" sz="1450" b="1" dirty="0">
+                <a:solidFill>
+                  <a:srgbClr val="CADCFC"/>
+                </a:solidFill>
+                <a:latin typeface="Microsoft YaHei" pitchFamily="34" charset="0"/>
+                <a:ea typeface="Microsoft YaHei" pitchFamily="34" charset="-122"/>
+                <a:cs typeface="Microsoft YaHei" pitchFamily="34" charset="-120"/>
+              </a:rPr>
+              <a:t>给 world-model 作者的真实可提交修复(均有实测证据)</a:t>
+            </a:r>
+            <a:endParaRPr lang="en-US" sz="1450" dirty="0"/>
+          </a:p>
+        </p:txBody>
+      </p:sp>
+      <p:sp>
+        <p:nvSpPr>
+          <p:cNvPr id="6" name="Text 4"/>
+          <p:cNvSpPr/>
+          <p:nvPr/>
+        </p:nvSpPr>
+        <p:spPr>
+          <a:xfrm>
+            <a:off x="777240" y="2240280"/>
+            <a:ext cx="6309360" cy="3657600"/>
           </a:xfrm>
           <a:prstGeom prst="rect">
             <a:avLst/>
@@ -5980,38 +6350,94 @@
               <a:buNone/>
             </a:pPr>
             <a:r>
-              <a:rPr lang="en-US" sz="1450" dirty="0">
-                <a:solidFill>
-                  <a:srgbClr val="1F2937"/>
-                </a:solidFill>
-                <a:latin typeface="Microsoft YaHei" pitchFamily="34" charset="0"/>
-                <a:ea typeface="Microsoft YaHei" pitchFamily="34" charset="-122"/>
-                <a:cs typeface="Microsoft YaHei" pitchFamily="34" charset="-120"/>
-              </a:rPr>
-              <a:t>但该平台为特定 Linux/CI 环境(Ubuntu 24.04)设计,本机从源码构建遭遇一连串版本兼容问题(编译器、Python、Gazebo、Fast-CDR 等)。</a:t>
-            </a:r>
-            <a:endParaRPr lang="en-US" sz="1450" dirty="0"/>
-          </a:p>
-        </p:txBody>
-      </p:sp>
-      <p:sp>
-        <p:nvSpPr>
-          <p:cNvPr id="6" name="Shape 4"/>
-          <p:cNvSpPr/>
-          <p:nvPr/>
-        </p:nvSpPr>
-        <p:spPr>
-          <a:xfrm>
-            <a:off x="548640" y="3383280"/>
-            <a:ext cx="11064240" cy="2651760"/>
+              <a:rPr lang="en-US" sz="1300" dirty="0">
+                <a:solidFill>
+                  <a:srgbClr val="A7F3D0"/>
+                </a:solidFill>
+                <a:latin typeface="Microsoft YaHei" pitchFamily="34" charset="0"/>
+                <a:ea typeface="Microsoft YaHei" pitchFamily="34" charset="-122"/>
+                <a:cs typeface="Microsoft YaHei" pitchFamily="34" charset="-120"/>
+              </a:rPr>
+              <a:t>① tomllib(头号):SLAM 在 Py3.10 一启动就崩(tomllib 是 3.11+)
+   → 回退 tomli;实测重跑后 SLAM 越过此崩溃
+</a:t>
+            </a:r>
+            <a:pPr indent="0" marL="0">
+              <a:lnSpc>
+                <a:spcPct val="120000"/>
+              </a:lnSpc>
+              <a:buNone/>
+            </a:pPr>
+            <a:r>
+              <a:rPr lang="en-US" sz="1300" dirty="0">
+                <a:solidFill>
+                  <a:srgbClr val="A7F3D0"/>
+                </a:solidFill>
+                <a:latin typeface="Microsoft YaHei" pitchFamily="34" charset="0"/>
+                <a:ea typeface="Microsoft YaHei" pitchFamily="34" charset="-122"/>
+                <a:cs typeface="Microsoft YaHei" pitchFamily="34" charset="-120"/>
+              </a:rPr>
+              <a:t>② 空 launch 参数:humble 拒绝空值 name:= → SLAM 起不来
+   → 跳过空参;实测 cartographer 节点真正运行起来
+</a:t>
+            </a:r>
+            <a:pPr indent="0" marL="0">
+              <a:lnSpc>
+                <a:spcPct val="120000"/>
+              </a:lnSpc>
+              <a:buNone/>
+            </a:pPr>
+            <a:r>
+              <a:rPr lang="en-US" sz="1300" dirty="0">
+                <a:solidFill>
+                  <a:srgbClr val="CADCFC"/>
+                </a:solidFill>
+                <a:latin typeface="Microsoft YaHei" pitchFamily="34" charset="0"/>
+                <a:ea typeface="Microsoft YaHei" pitchFamily="34" charset="-122"/>
+                <a:cs typeface="Microsoft YaHei" pitchFamily="34" charset="-120"/>
+              </a:rPr>
+              <a:t>③ 模板 %% 编译 bug:生成脚本无法编译 → 改单 %(独立次要)
+</a:t>
+            </a:r>
+            <a:pPr indent="0" marL="0">
+              <a:lnSpc>
+                <a:spcPct val="120000"/>
+              </a:lnSpc>
+              <a:buNone/>
+            </a:pPr>
+            <a:r>
+              <a:rPr lang="en-US" sz="1350" b="1" dirty="0">
+                <a:solidFill>
+                  <a:srgbClr val="FFFFFF"/>
+                </a:solidFill>
+                <a:latin typeface="Microsoft YaHei" pitchFamily="34" charset="0"/>
+                <a:ea typeface="Microsoft YaHei" pitchFamily="34" charset="-122"/>
+                <a:cs typeface="Microsoft YaHei" pitchFamily="34" charset="-120"/>
+              </a:rPr>
+              <a:t>成效:world-model 从「装不起来」→ 9 镜像齐 → SLAM 从「一崩」推进到「cartographer 真运行,只差激光数据」</a:t>
+            </a:r>
+            <a:endParaRPr lang="en-US" sz="1300" dirty="0"/>
+          </a:p>
+        </p:txBody>
+      </p:sp>
+      <p:sp>
+        <p:nvSpPr>
+          <p:cNvPr id="7" name="Shape 5"/>
+          <p:cNvSpPr/>
+          <p:nvPr/>
+        </p:nvSpPr>
+        <p:spPr>
+          <a:xfrm>
+            <a:off x="7589520" y="1645920"/>
+            <a:ext cx="4023360" cy="4389120"/>
           </a:xfrm>
           <a:prstGeom prst="roundRect">
             <a:avLst>
-              <a:gd name="adj" fmla="val 2759"/>
+              <a:gd name="adj" fmla="val 1818"/>
             </a:avLst>
           </a:prstGeom>
           <a:solidFill>
-            <a:srgbClr val="F0FDF4"/>
+            <a:srgbClr val="EFF6FF"/>
           </a:solidFill>
           <a:ln w="12700">
             <a:solidFill>
@@ -6023,14 +6449,14 @@
       </p:sp>
       <p:sp>
         <p:nvSpPr>
-          <p:cNvPr id="7" name="Text 5"/>
-          <p:cNvSpPr/>
-          <p:nvPr/>
-        </p:nvSpPr>
-        <p:spPr>
-          <a:xfrm>
-            <a:off x="822960" y="3566160"/>
-            <a:ext cx="10515600" cy="365760"/>
+          <p:cNvPr id="8" name="Text 6"/>
+          <p:cNvSpPr/>
+          <p:nvPr/>
+        </p:nvSpPr>
+        <p:spPr>
+          <a:xfrm>
+            <a:off x="7818120" y="1810512"/>
+            <a:ext cx="3566160" cy="365760"/>
           </a:xfrm>
           <a:prstGeom prst="rect">
             <a:avLst/>
@@ -6046,30 +6472,30 @@
               <a:buNone/>
             </a:pPr>
             <a:r>
-              <a:rPr lang="en-US" sz="1600" b="1" dirty="0">
-                <a:solidFill>
-                  <a:srgbClr val="16A34A"/>
-                </a:solidFill>
-                <a:latin typeface="Microsoft YaHei" pitchFamily="34" charset="0"/>
-                <a:ea typeface="Microsoft YaHei" pitchFamily="34" charset="-122"/>
-                <a:cs typeface="Microsoft YaHei" pitchFamily="34" charset="-120"/>
-              </a:rPr>
-              <a:t>关键判断 &amp; 调整</a:t>
-            </a:r>
-            <a:endParaRPr lang="en-US" sz="1600" dirty="0"/>
-          </a:p>
-        </p:txBody>
-      </p:sp>
-      <p:sp>
-        <p:nvSpPr>
-          <p:cNvPr id="8" name="Text 6"/>
-          <p:cNvSpPr/>
-          <p:nvPr/>
-        </p:nvSpPr>
-        <p:spPr>
-          <a:xfrm>
-            <a:off x="822960" y="4023360"/>
-            <a:ext cx="10515600" cy="1828800"/>
+              <a:rPr lang="en-US" sz="1450" b="1" dirty="0">
+                <a:solidFill>
+                  <a:srgbClr val="1E2761"/>
+                </a:solidFill>
+                <a:latin typeface="Microsoft YaHei" pitchFamily="34" charset="0"/>
+                <a:ea typeface="Microsoft YaHei" pitchFamily="34" charset="-122"/>
+                <a:cs typeface="Microsoft YaHei" pitchFamily="34" charset="-120"/>
+              </a:rPr>
+              <a:t>PR + Issue 已备好</a:t>
+            </a:r>
+            <a:endParaRPr lang="en-US" sz="1450" dirty="0"/>
+          </a:p>
+        </p:txBody>
+      </p:sp>
+      <p:sp>
+        <p:nvSpPr>
+          <p:cNvPr id="9" name="Text 7"/>
+          <p:cNvSpPr/>
+          <p:nvPr/>
+        </p:nvSpPr>
+        <p:spPr>
+          <a:xfrm>
+            <a:off x="7818120" y="2240280"/>
+            <a:ext cx="3566160" cy="3657600"/>
           </a:xfrm>
           <a:prstGeom prst="rect">
             <a:avLst/>
@@ -6083,12 +6509,12 @@
           <a:p>
             <a:pPr indent="0" marL="0">
               <a:lnSpc>
-                <a:spcPct val="130000"/>
-              </a:lnSpc>
-              <a:buNone/>
-            </a:pPr>
-            <a:r>
-              <a:rPr lang="en-US" sz="1450" dirty="0">
+                <a:spcPct val="125000"/>
+              </a:lnSpc>
+              <a:buNone/>
+            </a:pPr>
+            <a:r>
+              <a:rPr lang="en-US" sz="1300" b="1" dirty="0">
                 <a:solidFill>
                   <a:srgbClr val="1F2937"/>
                 </a:solidFill>
@@ -6096,19 +6522,17 @@
                 <a:ea typeface="Microsoft YaHei" pitchFamily="34" charset="-122"/>
                 <a:cs typeface="Microsoft YaHei" pitchFamily="34" charset="-120"/>
               </a:rPr>
-              <a:t>• 复现整个平台并非本任务核心——核心是算法理解 + 集成设计。</a:t>
-            </a:r>
-            <a:endParaRPr lang="en-US" sz="1450" dirty="0"/>
-          </a:p>
-          <a:p>
-            <a:pPr indent="0" marL="0">
-              <a:lnSpc>
-                <a:spcPct val="130000"/>
-              </a:lnSpc>
-              <a:buNone/>
-            </a:pPr>
-            <a:r>
-              <a:rPr lang="en-US" sz="1450" dirty="0">
+              <a:t>1 个 PR(4 commit:3 fix + 1 feat)+ 1 个 Issue
+</a:t>
+            </a:r>
+            <a:pPr indent="0" marL="0">
+              <a:lnSpc>
+                <a:spcPct val="125000"/>
+              </a:lnSpc>
+              <a:buNone/>
+            </a:pPr>
+            <a:r>
+              <a:rPr lang="en-US" sz="1250" dirty="0">
                 <a:solidFill>
                   <a:srgbClr val="1F2937"/>
                 </a:solidFill>
@@ -6116,19 +6540,17 @@
                 <a:ea typeface="Microsoft YaHei" pitchFamily="34" charset="-122"/>
                 <a:cs typeface="Microsoft YaHei" pitchFamily="34" charset="-120"/>
               </a:rPr>
-              <a:t>• 据此及时调整方向:聚焦算法本身,靠读源码论证缺陷、设计集成、让核心算法真跑起来。</a:t>
-            </a:r>
-            <a:endParaRPr lang="en-US" sz="1450" dirty="0"/>
-          </a:p>
-          <a:p>
-            <a:pPr indent="0" marL="0">
-              <a:lnSpc>
-                <a:spcPct val="130000"/>
-              </a:lnSpc>
-              <a:buNone/>
-            </a:pPr>
-            <a:r>
-              <a:rPr lang="en-US" sz="1450" dirty="0">
+              <a:t>物料齐全(integration/world-model-PR/):
+</a:t>
+            </a:r>
+            <a:pPr indent="0" marL="0">
+              <a:lnSpc>
+                <a:spcPct val="125000"/>
+              </a:lnSpc>
+              <a:buNone/>
+            </a:pPr>
+            <a:r>
+              <a:rPr lang="en-US" sz="1250" dirty="0">
                 <a:solidFill>
                   <a:srgbClr val="1F2937"/>
                 </a:solidFill>
@@ -6136,9 +6558,29 @@
                 <a:ea typeface="Microsoft YaHei" pitchFamily="34" charset="-122"/>
                 <a:cs typeface="Microsoft YaHei" pitchFamily="34" charset="-120"/>
               </a:rPr>
-              <a:t>• 教训:别为复现别人的基础设施过度投入;换 MacBook 也不解决(同样用 Docker/Linux,Apple 芯片反而更难)。</a:t>
-            </a:r>
-            <a:endParaRPr lang="en-US" sz="1450" dirty="0"/>
+              <a:t>• PR/Issue 正文 + 补丁
+• 修复/渲染证据
+• 手动提交分步教程
+</a:t>
+            </a:r>
+            <a:pPr indent="0" marL="0">
+              <a:lnSpc>
+                <a:spcPct val="125000"/>
+              </a:lnSpc>
+              <a:buNone/>
+            </a:pPr>
+            <a:r>
+              <a:rPr lang="en-US" sz="1300" b="1" dirty="0">
+                <a:solidFill>
+                  <a:srgbClr val="B45309"/>
+                </a:solidFill>
+                <a:latin typeface="Microsoft YaHei" pitchFamily="34" charset="0"/>
+                <a:ea typeface="Microsoft YaHei" pitchFamily="34" charset="-122"/>
+                <a:cs typeface="Microsoft YaHei" pitchFamily="34" charset="-120"/>
+              </a:rPr>
+              <a:t>状态:待亲自提交到作者仓库 → 任务闭环</a:t>
+            </a:r>
+            <a:endParaRPr lang="en-US" sz="1300" dirty="0"/>
           </a:p>
         </p:txBody>
       </p:sp>
